--- a/docs/architecture/presentations/keyforta-architecture-overview.pptx
+++ b/docs/architecture/presentations/keyforta-architecture-overview.pptx
@@ -16,6 +16,9 @@
     <p:sldId id="264" r:id="rId15"/>
     <p:sldId id="265" r:id="rId16"/>
     <p:sldId id="266" r:id="rId17"/>
+    <p:sldId id="267" r:id="rId18"/>
+    <p:sldId id="268" r:id="rId19"/>
+    <p:sldId id="269" r:id="rId20"/>
   </p:sldIdLst>
   <p:sldSz cx="12191695" cy="6858000" type="screen4x3"/>
   <p:notesSz cx="6858000" cy="9144000"/>
@@ -3390,7 +3393,7 @@
                 </a:solidFill>
                 <a:latin typeface="Calibri"/>
               </a:rPr>
-              <a:t>ADR-0009</a:t>
+              <a:t>SECTION 8</a:t>
             </a:r>
           </a:p>
         </p:txBody>
@@ -3419,13 +3422,13 @@
           <a:p>
             <a:pPr algn="l"/>
             <a:r>
-              <a:rPr sz="2800" b="1" i="0">
+              <a:rPr sz="2600" b="1" i="0">
                 <a:solidFill>
                   <a:srgbClr val="0B213F"/>
                 </a:solidFill>
                 <a:latin typeface="Calibri"/>
               </a:rPr>
-              <a:t>Open Decisions Before Production Launch</a:t>
+              <a:t>Open Decisions Before Production Launch (ADR-0009)</a:t>
             </a:r>
           </a:p>
         </p:txBody>
@@ -3484,7 +3487,7 @@
         </p:nvGraphicFramePr>
         <p:xfrm>
           <a:off x="548640" y="1417320"/>
-          <a:ext cx="11064240" cy="4279392"/>
+          <a:ext cx="11064240" cy="4114800"/>
         </p:xfrm>
         <a:graphic>
           <a:graphicData uri="http://schemas.openxmlformats.org/drawingml/2006/table">
@@ -3496,7 +3499,7 @@
                 <a:gridCol w="6858000"/>
                 <a:gridCol w="4206240"/>
               </a:tblGrid>
-              <a:tr h="475488">
+              <a:tr h="457200">
                 <a:tc>
                   <a:txBody>
                     <a:bodyPr/>
@@ -3504,7 +3507,7 @@
                     <a:p>
                       <a:pPr algn="l"/>
                       <a:r>
-                        <a:rPr sz="1200" b="1">
+                        <a:rPr sz="1250" b="1">
                           <a:solidFill>
                             <a:srgbClr val="FFFFFF"/>
                           </a:solidFill>
@@ -3526,7 +3529,7 @@
                     <a:p>
                       <a:pPr algn="l"/>
                       <a:r>
-                        <a:rPr sz="1200" b="1">
+                        <a:rPr sz="1250" b="1">
                           <a:solidFill>
                             <a:srgbClr val="FFFFFF"/>
                           </a:solidFill>
@@ -3542,7 +3545,7 @@
                   </a:tcPr>
                 </a:tc>
               </a:tr>
-              <a:tr h="475488">
+              <a:tr h="457200">
                 <a:tc>
                   <a:txBody>
                     <a:bodyPr/>
@@ -3550,7 +3553,7 @@
                     <a:p>
                       <a:pPr algn="l"/>
                       <a:r>
-                        <a:rPr sz="1150" b="0">
+                        <a:rPr sz="1150" b="1">
                           <a:solidFill>
                             <a:srgbClr val="0B213F"/>
                           </a:solidFill>
@@ -3588,7 +3591,7 @@
                   </a:tcPr>
                 </a:tc>
               </a:tr>
-              <a:tr h="475488">
+              <a:tr h="457200">
                 <a:tc>
                   <a:txBody>
                     <a:bodyPr/>
@@ -3596,7 +3599,7 @@
                     <a:p>
                       <a:pPr algn="l"/>
                       <a:r>
-                        <a:rPr sz="1150" b="0">
+                        <a:rPr sz="1150" b="1">
                           <a:solidFill>
                             <a:srgbClr val="0B213F"/>
                           </a:solidFill>
@@ -3634,7 +3637,7 @@
                   </a:tcPr>
                 </a:tc>
               </a:tr>
-              <a:tr h="475488">
+              <a:tr h="457200">
                 <a:tc>
                   <a:txBody>
                     <a:bodyPr/>
@@ -3642,7 +3645,7 @@
                     <a:p>
                       <a:pPr algn="l"/>
                       <a:r>
-                        <a:rPr sz="1150" b="0">
+                        <a:rPr sz="1150" b="1">
                           <a:solidFill>
                             <a:srgbClr val="0B213F"/>
                           </a:solidFill>
@@ -3680,7 +3683,7 @@
                   </a:tcPr>
                 </a:tc>
               </a:tr>
-              <a:tr h="475488">
+              <a:tr h="457200">
                 <a:tc>
                   <a:txBody>
                     <a:bodyPr/>
@@ -3688,7 +3691,7 @@
                     <a:p>
                       <a:pPr algn="l"/>
                       <a:r>
-                        <a:rPr sz="1150" b="0">
+                        <a:rPr sz="1150" b="1">
                           <a:solidFill>
                             <a:srgbClr val="0B213F"/>
                           </a:solidFill>
@@ -3726,7 +3729,7 @@
                   </a:tcPr>
                 </a:tc>
               </a:tr>
-              <a:tr h="475488">
+              <a:tr h="457200">
                 <a:tc>
                   <a:txBody>
                     <a:bodyPr/>
@@ -3734,7 +3737,7 @@
                     <a:p>
                       <a:pPr algn="l"/>
                       <a:r>
-                        <a:rPr sz="1150" b="0">
+                        <a:rPr sz="1150" b="1">
                           <a:solidFill>
                             <a:srgbClr val="0B213F"/>
                           </a:solidFill>
@@ -3772,7 +3775,7 @@
                   </a:tcPr>
                 </a:tc>
               </a:tr>
-              <a:tr h="475488">
+              <a:tr h="457200">
                 <a:tc>
                   <a:txBody>
                     <a:bodyPr/>
@@ -3780,7 +3783,7 @@
                     <a:p>
                       <a:pPr algn="l"/>
                       <a:r>
-                        <a:rPr sz="1150" b="0">
+                        <a:rPr sz="1150" b="1">
                           <a:solidFill>
                             <a:srgbClr val="0B213F"/>
                           </a:solidFill>
@@ -3818,7 +3821,7 @@
                   </a:tcPr>
                 </a:tc>
               </a:tr>
-              <a:tr h="475488">
+              <a:tr h="457200">
                 <a:tc>
                   <a:txBody>
                     <a:bodyPr/>
@@ -3826,7 +3829,7 @@
                     <a:p>
                       <a:pPr algn="l"/>
                       <a:r>
-                        <a:rPr sz="1150" b="0">
+                        <a:rPr sz="1150" b="1">
                           <a:solidFill>
                             <a:srgbClr val="0B213F"/>
                           </a:solidFill>
@@ -3864,7 +3867,7 @@
                   </a:tcPr>
                 </a:tc>
               </a:tr>
-              <a:tr h="475488">
+              <a:tr h="457200">
                 <a:tc>
                   <a:txBody>
                     <a:bodyPr/>
@@ -3872,7 +3875,7 @@
                     <a:p>
                       <a:pPr algn="l"/>
                       <a:r>
-                        <a:rPr sz="1150" b="0">
+                        <a:rPr sz="1150" b="1">
                           <a:solidFill>
                             <a:srgbClr val="0B213F"/>
                           </a:solidFill>
@@ -4045,6 +4048,2712 @@
     <p:bg>
       <p:bgPr>
         <a:solidFill>
+          <a:srgbClr val="FFFFFF"/>
+        </a:solidFill>
+        <a:effectLst/>
+      </p:bgPr>
+    </p:bg>
+    <p:spTree>
+      <p:nvGrpSpPr>
+        <p:cNvPr id="1" name=""/>
+        <p:cNvGrpSpPr/>
+        <p:nvPr/>
+      </p:nvGrpSpPr>
+      <p:grpSpPr/>
+      <p:sp>
+        <p:nvSpPr>
+          <p:cNvPr id="2" name="Rectangle 1"/>
+          <p:cNvSpPr/>
+          <p:nvPr/>
+        </p:nvSpPr>
+        <p:spPr>
+          <a:xfrm>
+            <a:off x="0" y="0"/>
+            <a:ext cx="12191695" cy="128016"/>
+          </a:xfrm>
+          <a:prstGeom prst="rect">
+            <a:avLst/>
+          </a:prstGeom>
+          <a:solidFill>
+            <a:srgbClr val="C99A2E"/>
+          </a:solidFill>
+          <a:ln>
+            <a:noFill/>
+          </a:ln>
+          <a:effectLst/>
+        </p:spPr>
+        <p:style>
+          <a:lnRef idx="1">
+            <a:schemeClr val="accent1"/>
+          </a:lnRef>
+          <a:fillRef idx="3">
+            <a:schemeClr val="accent1"/>
+          </a:fillRef>
+          <a:effectRef idx="2">
+            <a:schemeClr val="accent1"/>
+          </a:effectRef>
+          <a:fontRef idx="minor">
+            <a:schemeClr val="lt1"/>
+          </a:fontRef>
+        </p:style>
+        <p:txBody>
+          <a:bodyPr rtlCol="0" anchor="ctr"/>
+          <a:lstStyle/>
+          <a:p>
+            <a:pPr algn="ctr"/>
+          </a:p>
+        </p:txBody>
+      </p:sp>
+      <p:sp>
+        <p:nvSpPr>
+          <p:cNvPr id="3" name="TextBox 2"/>
+          <p:cNvSpPr txBox="1"/>
+          <p:nvPr/>
+        </p:nvSpPr>
+        <p:spPr>
+          <a:xfrm>
+            <a:off x="548640" y="256032"/>
+            <a:ext cx="10058400" cy="320040"/>
+          </a:xfrm>
+          <a:prstGeom prst="rect">
+            <a:avLst/>
+          </a:prstGeom>
+          <a:noFill/>
+        </p:spPr>
+        <p:txBody>
+          <a:bodyPr wrap="square">
+            <a:spAutoFit/>
+          </a:bodyPr>
+          <a:lstStyle/>
+          <a:p>
+            <a:pPr algn="l"/>
+            <a:r>
+              <a:rPr sz="1300" b="1" i="0">
+                <a:solidFill>
+                  <a:srgbClr val="0E7C86"/>
+                </a:solidFill>
+                <a:latin typeface="Calibri"/>
+              </a:rPr>
+              <a:t>REFERENCE</a:t>
+            </a:r>
+          </a:p>
+        </p:txBody>
+      </p:sp>
+      <p:sp>
+        <p:nvSpPr>
+          <p:cNvPr id="4" name="TextBox 3"/>
+          <p:cNvSpPr txBox="1"/>
+          <p:nvPr/>
+        </p:nvSpPr>
+        <p:spPr>
+          <a:xfrm>
+            <a:off x="548640" y="548640"/>
+            <a:ext cx="10972800" cy="640080"/>
+          </a:xfrm>
+          <a:prstGeom prst="rect">
+            <a:avLst/>
+          </a:prstGeom>
+          <a:noFill/>
+        </p:spPr>
+        <p:txBody>
+          <a:bodyPr wrap="square">
+            <a:spAutoFit/>
+          </a:bodyPr>
+          <a:lstStyle/>
+          <a:p>
+            <a:pPr algn="l"/>
+            <a:r>
+              <a:rPr sz="2600" b="1" i="0">
+                <a:solidFill>
+                  <a:srgbClr val="0B213F"/>
+                </a:solidFill>
+                <a:latin typeface="Calibri"/>
+              </a:rPr>
+              <a:t>Glossary (1 of 2)</a:t>
+            </a:r>
+          </a:p>
+        </p:txBody>
+      </p:sp>
+      <p:sp>
+        <p:nvSpPr>
+          <p:cNvPr id="5" name="Rectangle 4"/>
+          <p:cNvSpPr/>
+          <p:nvPr/>
+        </p:nvSpPr>
+        <p:spPr>
+          <a:xfrm>
+            <a:off x="548640" y="1170432"/>
+            <a:ext cx="1005840" cy="41148"/>
+          </a:xfrm>
+          <a:prstGeom prst="rect">
+            <a:avLst/>
+          </a:prstGeom>
+          <a:solidFill>
+            <a:srgbClr val="C99A2E"/>
+          </a:solidFill>
+          <a:ln>
+            <a:noFill/>
+          </a:ln>
+          <a:effectLst/>
+        </p:spPr>
+        <p:style>
+          <a:lnRef idx="1">
+            <a:schemeClr val="accent1"/>
+          </a:lnRef>
+          <a:fillRef idx="3">
+            <a:schemeClr val="accent1"/>
+          </a:fillRef>
+          <a:effectRef idx="2">
+            <a:schemeClr val="accent1"/>
+          </a:effectRef>
+          <a:fontRef idx="minor">
+            <a:schemeClr val="lt1"/>
+          </a:fontRef>
+        </p:style>
+        <p:txBody>
+          <a:bodyPr rtlCol="0" anchor="ctr"/>
+          <a:lstStyle/>
+          <a:p>
+            <a:pPr algn="ctr"/>
+          </a:p>
+        </p:txBody>
+      </p:sp>
+      <p:graphicFrame>
+        <p:nvGraphicFramePr>
+          <p:cNvPr id="6" name="Table 5"/>
+          <p:cNvGraphicFramePr>
+            <a:graphicFrameLocks noGrp="1"/>
+          </p:cNvGraphicFramePr>
+          <p:nvPr/>
+        </p:nvGraphicFramePr>
+        <p:xfrm>
+          <a:off x="548640" y="1417320"/>
+          <a:ext cx="11064239" cy="3657600"/>
+        </p:xfrm>
+        <a:graphic>
+          <a:graphicData uri="http://schemas.openxmlformats.org/drawingml/2006/table">
+            <a:tbl>
+              <a:tblPr firstRow="1" bandRow="1">
+                <a:tableStyleId>{5C22544A-7EE6-4342-B048-85BDC9FD1C3A}</a:tableStyleId>
+              </a:tblPr>
+              <a:tblGrid>
+                <a:gridCol w="3108960"/>
+                <a:gridCol w="7955279"/>
+              </a:tblGrid>
+              <a:tr h="457200">
+                <a:tc>
+                  <a:txBody>
+                    <a:bodyPr/>
+                    <a:lstStyle/>
+                    <a:p>
+                      <a:pPr algn="l"/>
+                      <a:r>
+                        <a:rPr sz="1200" b="1">
+                          <a:solidFill>
+                            <a:srgbClr val="FFFFFF"/>
+                          </a:solidFill>
+                        </a:rPr>
+                        <a:t>Term</a:t>
+                      </a:r>
+                    </a:p>
+                  </a:txBody>
+                  <a:tcPr anchor="ctr" marL="73152" marR="73152" marT="27432" marB="27432">
+                    <a:solidFill>
+                      <a:srgbClr val="0B213F"/>
+                    </a:solidFill>
+                  </a:tcPr>
+                </a:tc>
+                <a:tc>
+                  <a:txBody>
+                    <a:bodyPr/>
+                    <a:lstStyle/>
+                    <a:p>
+                      <a:pPr algn="l"/>
+                      <a:r>
+                        <a:rPr sz="1200" b="1">
+                          <a:solidFill>
+                            <a:srgbClr val="FFFFFF"/>
+                          </a:solidFill>
+                        </a:rPr>
+                        <a:t>Meaning</a:t>
+                      </a:r>
+                    </a:p>
+                  </a:txBody>
+                  <a:tcPr anchor="ctr" marL="73152" marR="73152" marT="27432" marB="27432">
+                    <a:solidFill>
+                      <a:srgbClr val="0B213F"/>
+                    </a:solidFill>
+                  </a:tcPr>
+                </a:tc>
+              </a:tr>
+              <a:tr h="457200">
+                <a:tc>
+                  <a:txBody>
+                    <a:bodyPr/>
+                    <a:lstStyle/>
+                    <a:p>
+                      <a:pPr algn="l"/>
+                      <a:r>
+                        <a:rPr sz="1100" b="1">
+                          <a:solidFill>
+                            <a:srgbClr val="0B213F"/>
+                          </a:solidFill>
+                        </a:rPr>
+                        <a:t>Modular monolith</a:t>
+                      </a:r>
+                    </a:p>
+                  </a:txBody>
+                  <a:tcPr anchor="ctr" marL="73152" marR="73152" marT="27432" marB="27432">
+                    <a:solidFill>
+                      <a:srgbClr val="FFFFFF"/>
+                    </a:solidFill>
+                  </a:tcPr>
+                </a:tc>
+                <a:tc>
+                  <a:txBody>
+                    <a:bodyPr/>
+                    <a:lstStyle/>
+                    <a:p>
+                      <a:pPr algn="l"/>
+                      <a:r>
+                        <a:rPr sz="1100" b="0">
+                          <a:solidFill>
+                            <a:srgbClr val="0B213F"/>
+                          </a:solidFill>
+                        </a:rPr>
+                        <a:t>A single deployed application internally organized into strict domain modules that communicate through commands, queries, and events instead of shared database access</a:t>
+                      </a:r>
+                    </a:p>
+                  </a:txBody>
+                  <a:tcPr anchor="ctr" marL="73152" marR="73152" marT="27432" marB="27432">
+                    <a:solidFill>
+                      <a:srgbClr val="FFFFFF"/>
+                    </a:solidFill>
+                  </a:tcPr>
+                </a:tc>
+              </a:tr>
+              <a:tr h="457200">
+                <a:tc>
+                  <a:txBody>
+                    <a:bodyPr/>
+                    <a:lstStyle/>
+                    <a:p>
+                      <a:pPr algn="l"/>
+                      <a:r>
+                        <a:rPr sz="1100" b="1">
+                          <a:solidFill>
+                            <a:srgbClr val="0B213F"/>
+                          </a:solidFill>
+                        </a:rPr>
+                        <a:t>Row-Level Security (RLS)</a:t>
+                      </a:r>
+                    </a:p>
+                  </a:txBody>
+                  <a:tcPr anchor="ctr" marL="73152" marR="73152" marT="27432" marB="27432">
+                    <a:solidFill>
+                      <a:srgbClr val="F4F6F8"/>
+                    </a:solidFill>
+                  </a:tcPr>
+                </a:tc>
+                <a:tc>
+                  <a:txBody>
+                    <a:bodyPr/>
+                    <a:lstStyle/>
+                    <a:p>
+                      <a:pPr algn="l"/>
+                      <a:r>
+                        <a:rPr sz="1100" b="0">
+                          <a:solidFill>
+                            <a:srgbClr val="0B213F"/>
+                          </a:solidFill>
+                        </a:rPr>
+                        <a:t>A PostgreSQL feature that restricts which rows a query can see or modify based on the caller's context; used here as defense in depth behind application authorization</a:t>
+                      </a:r>
+                    </a:p>
+                  </a:txBody>
+                  <a:tcPr anchor="ctr" marL="73152" marR="73152" marT="27432" marB="27432">
+                    <a:solidFill>
+                      <a:srgbClr val="F4F6F8"/>
+                    </a:solidFill>
+                  </a:tcPr>
+                </a:tc>
+              </a:tr>
+              <a:tr h="457200">
+                <a:tc>
+                  <a:txBody>
+                    <a:bodyPr/>
+                    <a:lstStyle/>
+                    <a:p>
+                      <a:pPr algn="l"/>
+                      <a:r>
+                        <a:rPr sz="1100" b="1">
+                          <a:solidFill>
+                            <a:srgbClr val="0B213F"/>
+                          </a:solidFill>
+                        </a:rPr>
+                        <a:t>Managed identity</a:t>
+                      </a:r>
+                    </a:p>
+                  </a:txBody>
+                  <a:tcPr anchor="ctr" marL="73152" marR="73152" marT="27432" marB="27432">
+                    <a:solidFill>
+                      <a:srgbClr val="FFFFFF"/>
+                    </a:solidFill>
+                  </a:tcPr>
+                </a:tc>
+                <a:tc>
+                  <a:txBody>
+                    <a:bodyPr/>
+                    <a:lstStyle/>
+                    <a:p>
+                      <a:pPr algn="l"/>
+                      <a:r>
+                        <a:rPr sz="1100" b="0">
+                          <a:solidFill>
+                            <a:srgbClr val="0B213F"/>
+                          </a:solidFill>
+                        </a:rPr>
+                        <a:t>An Azure identity automatically managed by the platform so an application or pipeline can authenticate without a stored password or secret</a:t>
+                      </a:r>
+                    </a:p>
+                  </a:txBody>
+                  <a:tcPr anchor="ctr" marL="73152" marR="73152" marT="27432" marB="27432">
+                    <a:solidFill>
+                      <a:srgbClr val="FFFFFF"/>
+                    </a:solidFill>
+                  </a:tcPr>
+                </a:tc>
+              </a:tr>
+              <a:tr h="457200">
+                <a:tc>
+                  <a:txBody>
+                    <a:bodyPr/>
+                    <a:lstStyle/>
+                    <a:p>
+                      <a:pPr algn="l"/>
+                      <a:r>
+                        <a:rPr sz="1100" b="1">
+                          <a:solidFill>
+                            <a:srgbClr val="0B213F"/>
+                          </a:solidFill>
+                        </a:rPr>
+                        <a:t>Access token (bearer scheme)</a:t>
+                      </a:r>
+                    </a:p>
+                  </a:txBody>
+                  <a:tcPr anchor="ctr" marL="73152" marR="73152" marT="27432" marB="27432">
+                    <a:solidFill>
+                      <a:srgbClr val="F4F6F8"/>
+                    </a:solidFill>
+                  </a:tcPr>
+                </a:tc>
+                <a:tc>
+                  <a:txBody>
+                    <a:bodyPr/>
+                    <a:lstStyle/>
+                    <a:p>
+                      <a:pPr algn="l"/>
+                      <a:r>
+                        <a:rPr sz="1100" b="0">
+                          <a:solidFill>
+                            <a:srgbClr val="0B213F"/>
+                          </a:solidFill>
+                        </a:rPr>
+                        <a:t>A credential included with an API request that grants access to whoever presents it, without further proof of identity</a:t>
+                      </a:r>
+                    </a:p>
+                  </a:txBody>
+                  <a:tcPr anchor="ctr" marL="73152" marR="73152" marT="27432" marB="27432">
+                    <a:solidFill>
+                      <a:srgbClr val="F4F6F8"/>
+                    </a:solidFill>
+                  </a:tcPr>
+                </a:tc>
+              </a:tr>
+              <a:tr h="457200">
+                <a:tc>
+                  <a:txBody>
+                    <a:bodyPr/>
+                    <a:lstStyle/>
+                    <a:p>
+                      <a:pPr algn="l"/>
+                      <a:r>
+                        <a:rPr sz="1100" b="1">
+                          <a:solidFill>
+                            <a:srgbClr val="0B213F"/>
+                          </a:solidFill>
+                        </a:rPr>
+                        <a:t>Zero-trust authorization</a:t>
+                      </a:r>
+                    </a:p>
+                  </a:txBody>
+                  <a:tcPr anchor="ctr" marL="73152" marR="73152" marT="27432" marB="27432">
+                    <a:solidFill>
+                      <a:srgbClr val="FFFFFF"/>
+                    </a:solidFill>
+                  </a:tcPr>
+                </a:tc>
+                <a:tc>
+                  <a:txBody>
+                    <a:bodyPr/>
+                    <a:lstStyle/>
+                    <a:p>
+                      <a:pPr algn="l"/>
+                      <a:r>
+                        <a:rPr sz="1100" b="0">
+                          <a:solidFill>
+                            <a:srgbClr val="0B213F"/>
+                          </a:solidFill>
+                        </a:rPr>
+                        <a:t>A design principle where every request is independently authenticated and authorized, regardless of network location or prior trust</a:t>
+                      </a:r>
+                    </a:p>
+                  </a:txBody>
+                  <a:tcPr anchor="ctr" marL="73152" marR="73152" marT="27432" marB="27432">
+                    <a:solidFill>
+                      <a:srgbClr val="FFFFFF"/>
+                    </a:solidFill>
+                  </a:tcPr>
+                </a:tc>
+              </a:tr>
+              <a:tr h="457200">
+                <a:tc>
+                  <a:txBody>
+                    <a:bodyPr/>
+                    <a:lstStyle/>
+                    <a:p>
+                      <a:pPr algn="l"/>
+                      <a:r>
+                        <a:rPr sz="1100" b="1">
+                          <a:solidFill>
+                            <a:srgbClr val="0B213F"/>
+                          </a:solidFill>
+                        </a:rPr>
+                        <a:t>Minor units (money)</a:t>
+                      </a:r>
+                    </a:p>
+                  </a:txBody>
+                  <a:tcPr anchor="ctr" marL="73152" marR="73152" marT="27432" marB="27432">
+                    <a:solidFill>
+                      <a:srgbClr val="F4F6F8"/>
+                    </a:solidFill>
+                  </a:tcPr>
+                </a:tc>
+                <a:tc>
+                  <a:txBody>
+                    <a:bodyPr/>
+                    <a:lstStyle/>
+                    <a:p>
+                      <a:pPr algn="l"/>
+                      <a:r>
+                        <a:rPr sz="1100" b="0">
+                          <a:solidFill>
+                            <a:srgbClr val="0B213F"/>
+                          </a:solidFill>
+                        </a:rPr>
+                        <a:t>The smallest whole unit of a currency (e.g., cents) used to avoid floating-point rounding errors in financial calculations</a:t>
+                      </a:r>
+                    </a:p>
+                  </a:txBody>
+                  <a:tcPr anchor="ctr" marL="73152" marR="73152" marT="27432" marB="27432">
+                    <a:solidFill>
+                      <a:srgbClr val="F4F6F8"/>
+                    </a:solidFill>
+                  </a:tcPr>
+                </a:tc>
+              </a:tr>
+              <a:tr h="457200">
+                <a:tc>
+                  <a:txBody>
+                    <a:bodyPr/>
+                    <a:lstStyle/>
+                    <a:p>
+                      <a:pPr algn="l"/>
+                      <a:r>
+                        <a:rPr sz="1100" b="1">
+                          <a:solidFill>
+                            <a:srgbClr val="0B213F"/>
+                          </a:solidFill>
+                        </a:rPr>
+                        <a:t>Immutable posting</a:t>
+                      </a:r>
+                    </a:p>
+                  </a:txBody>
+                  <a:tcPr anchor="ctr" marL="73152" marR="73152" marT="27432" marB="27432">
+                    <a:solidFill>
+                      <a:srgbClr val="FFFFFF"/>
+                    </a:solidFill>
+                  </a:tcPr>
+                </a:tc>
+                <a:tc>
+                  <a:txBody>
+                    <a:bodyPr/>
+                    <a:lstStyle/>
+                    <a:p>
+                      <a:pPr algn="l"/>
+                      <a:r>
+                        <a:rPr sz="1100" b="0">
+                          <a:solidFill>
+                            <a:srgbClr val="0B213F"/>
+                          </a:solidFill>
+                        </a:rPr>
+                        <a:t>A financial transaction record that is never edited after being recorded; corrections are made by reversing and replacing it</a:t>
+                      </a:r>
+                    </a:p>
+                  </a:txBody>
+                  <a:tcPr anchor="ctr" marL="73152" marR="73152" marT="27432" marB="27432">
+                    <a:solidFill>
+                      <a:srgbClr val="FFFFFF"/>
+                    </a:solidFill>
+                  </a:tcPr>
+                </a:tc>
+              </a:tr>
+            </a:tbl>
+          </a:graphicData>
+        </a:graphic>
+      </p:graphicFrame>
+      <p:sp>
+        <p:nvSpPr>
+          <p:cNvPr id="7" name="TextBox 6"/>
+          <p:cNvSpPr txBox="1"/>
+          <p:nvPr/>
+        </p:nvSpPr>
+        <p:spPr>
+          <a:xfrm>
+            <a:off x="548640" y="6446520"/>
+            <a:ext cx="5486400" cy="274320"/>
+          </a:xfrm>
+          <a:prstGeom prst="rect">
+            <a:avLst/>
+          </a:prstGeom>
+          <a:noFill/>
+        </p:spPr>
+        <p:txBody>
+          <a:bodyPr wrap="square">
+            <a:spAutoFit/>
+          </a:bodyPr>
+          <a:lstStyle/>
+          <a:p>
+            <a:pPr algn="l"/>
+            <a:r>
+              <a:rPr sz="900" b="0" i="0">
+                <a:solidFill>
+                  <a:srgbClr val="555F6B"/>
+                </a:solidFill>
+                <a:latin typeface="Calibri"/>
+              </a:rPr>
+              <a:t>KEYFORTA — Architecture Overview · Confidential</a:t>
+            </a:r>
+          </a:p>
+        </p:txBody>
+      </p:sp>
+      <p:sp>
+        <p:nvSpPr>
+          <p:cNvPr id="8" name="TextBox 7"/>
+          <p:cNvSpPr txBox="1"/>
+          <p:nvPr/>
+        </p:nvSpPr>
+        <p:spPr>
+          <a:xfrm>
+            <a:off x="10911535" y="6446520"/>
+            <a:ext cx="822960" cy="274320"/>
+          </a:xfrm>
+          <a:prstGeom prst="rect">
+            <a:avLst/>
+          </a:prstGeom>
+          <a:noFill/>
+        </p:spPr>
+        <p:txBody>
+          <a:bodyPr wrap="square">
+            <a:spAutoFit/>
+          </a:bodyPr>
+          <a:lstStyle/>
+          <a:p>
+            <a:pPr algn="r"/>
+            <a:r>
+              <a:rPr sz="900" b="0" i="0">
+                <a:solidFill>
+                  <a:srgbClr val="555F6B"/>
+                </a:solidFill>
+                <a:latin typeface="Calibri"/>
+              </a:rPr>
+              <a:t>11</a:t>
+            </a:r>
+          </a:p>
+        </p:txBody>
+      </p:sp>
+    </p:spTree>
+  </p:cSld>
+  <p:clrMapOvr>
+    <a:masterClrMapping/>
+  </p:clrMapOvr>
+</p:sld>
+</file>
+
+<file path=ppt/slides/slide12.xml><?xml version="1.0" encoding="utf-8"?>
+<p:sld xmlns:a="http://schemas.openxmlformats.org/drawingml/2006/main" xmlns:p="http://schemas.openxmlformats.org/presentationml/2006/main" xmlns:r="http://schemas.openxmlformats.org/officeDocument/2006/relationships">
+  <p:cSld>
+    <p:bg>
+      <p:bgPr>
+        <a:solidFill>
+          <a:srgbClr val="FFFFFF"/>
+        </a:solidFill>
+        <a:effectLst/>
+      </p:bgPr>
+    </p:bg>
+    <p:spTree>
+      <p:nvGrpSpPr>
+        <p:cNvPr id="1" name=""/>
+        <p:cNvGrpSpPr/>
+        <p:nvPr/>
+      </p:nvGrpSpPr>
+      <p:grpSpPr/>
+      <p:sp>
+        <p:nvSpPr>
+          <p:cNvPr id="2" name="Rectangle 1"/>
+          <p:cNvSpPr/>
+          <p:nvPr/>
+        </p:nvSpPr>
+        <p:spPr>
+          <a:xfrm>
+            <a:off x="0" y="0"/>
+            <a:ext cx="12191695" cy="128016"/>
+          </a:xfrm>
+          <a:prstGeom prst="rect">
+            <a:avLst/>
+          </a:prstGeom>
+          <a:solidFill>
+            <a:srgbClr val="C99A2E"/>
+          </a:solidFill>
+          <a:ln>
+            <a:noFill/>
+          </a:ln>
+          <a:effectLst/>
+        </p:spPr>
+        <p:style>
+          <a:lnRef idx="1">
+            <a:schemeClr val="accent1"/>
+          </a:lnRef>
+          <a:fillRef idx="3">
+            <a:schemeClr val="accent1"/>
+          </a:fillRef>
+          <a:effectRef idx="2">
+            <a:schemeClr val="accent1"/>
+          </a:effectRef>
+          <a:fontRef idx="minor">
+            <a:schemeClr val="lt1"/>
+          </a:fontRef>
+        </p:style>
+        <p:txBody>
+          <a:bodyPr rtlCol="0" anchor="ctr"/>
+          <a:lstStyle/>
+          <a:p>
+            <a:pPr algn="ctr"/>
+          </a:p>
+        </p:txBody>
+      </p:sp>
+      <p:sp>
+        <p:nvSpPr>
+          <p:cNvPr id="3" name="TextBox 2"/>
+          <p:cNvSpPr txBox="1"/>
+          <p:nvPr/>
+        </p:nvSpPr>
+        <p:spPr>
+          <a:xfrm>
+            <a:off x="548640" y="256032"/>
+            <a:ext cx="10058400" cy="320040"/>
+          </a:xfrm>
+          <a:prstGeom prst="rect">
+            <a:avLst/>
+          </a:prstGeom>
+          <a:noFill/>
+        </p:spPr>
+        <p:txBody>
+          <a:bodyPr wrap="square">
+            <a:spAutoFit/>
+          </a:bodyPr>
+          <a:lstStyle/>
+          <a:p>
+            <a:pPr algn="l"/>
+            <a:r>
+              <a:rPr sz="1300" b="1" i="0">
+                <a:solidFill>
+                  <a:srgbClr val="0E7C86"/>
+                </a:solidFill>
+                <a:latin typeface="Calibri"/>
+              </a:rPr>
+              <a:t>REFERENCE</a:t>
+            </a:r>
+          </a:p>
+        </p:txBody>
+      </p:sp>
+      <p:sp>
+        <p:nvSpPr>
+          <p:cNvPr id="4" name="TextBox 3"/>
+          <p:cNvSpPr txBox="1"/>
+          <p:nvPr/>
+        </p:nvSpPr>
+        <p:spPr>
+          <a:xfrm>
+            <a:off x="548640" y="548640"/>
+            <a:ext cx="10972800" cy="640080"/>
+          </a:xfrm>
+          <a:prstGeom prst="rect">
+            <a:avLst/>
+          </a:prstGeom>
+          <a:noFill/>
+        </p:spPr>
+        <p:txBody>
+          <a:bodyPr wrap="square">
+            <a:spAutoFit/>
+          </a:bodyPr>
+          <a:lstStyle/>
+          <a:p>
+            <a:pPr algn="l"/>
+            <a:r>
+              <a:rPr sz="2600" b="1" i="0">
+                <a:solidFill>
+                  <a:srgbClr val="0B213F"/>
+                </a:solidFill>
+                <a:latin typeface="Calibri"/>
+              </a:rPr>
+              <a:t>Glossary (2 of 2)</a:t>
+            </a:r>
+          </a:p>
+        </p:txBody>
+      </p:sp>
+      <p:sp>
+        <p:nvSpPr>
+          <p:cNvPr id="5" name="Rectangle 4"/>
+          <p:cNvSpPr/>
+          <p:nvPr/>
+        </p:nvSpPr>
+        <p:spPr>
+          <a:xfrm>
+            <a:off x="548640" y="1170432"/>
+            <a:ext cx="1005840" cy="41148"/>
+          </a:xfrm>
+          <a:prstGeom prst="rect">
+            <a:avLst/>
+          </a:prstGeom>
+          <a:solidFill>
+            <a:srgbClr val="C99A2E"/>
+          </a:solidFill>
+          <a:ln>
+            <a:noFill/>
+          </a:ln>
+          <a:effectLst/>
+        </p:spPr>
+        <p:style>
+          <a:lnRef idx="1">
+            <a:schemeClr val="accent1"/>
+          </a:lnRef>
+          <a:fillRef idx="3">
+            <a:schemeClr val="accent1"/>
+          </a:fillRef>
+          <a:effectRef idx="2">
+            <a:schemeClr val="accent1"/>
+          </a:effectRef>
+          <a:fontRef idx="minor">
+            <a:schemeClr val="lt1"/>
+          </a:fontRef>
+        </p:style>
+        <p:txBody>
+          <a:bodyPr rtlCol="0" anchor="ctr"/>
+          <a:lstStyle/>
+          <a:p>
+            <a:pPr algn="ctr"/>
+          </a:p>
+        </p:txBody>
+      </p:sp>
+      <p:graphicFrame>
+        <p:nvGraphicFramePr>
+          <p:cNvPr id="6" name="Table 5"/>
+          <p:cNvGraphicFramePr>
+            <a:graphicFrameLocks noGrp="1"/>
+          </p:cNvGraphicFramePr>
+          <p:nvPr/>
+        </p:nvGraphicFramePr>
+        <p:xfrm>
+          <a:off x="548640" y="1417320"/>
+          <a:ext cx="11064239" cy="5029200"/>
+        </p:xfrm>
+        <a:graphic>
+          <a:graphicData uri="http://schemas.openxmlformats.org/drawingml/2006/table">
+            <a:tbl>
+              <a:tblPr firstRow="1" bandRow="1">
+                <a:tableStyleId>{5C22544A-7EE6-4342-B048-85BDC9FD1C3A}</a:tableStyleId>
+              </a:tblPr>
+              <a:tblGrid>
+                <a:gridCol w="3108960"/>
+                <a:gridCol w="7955279"/>
+              </a:tblGrid>
+              <a:tr h="457200">
+                <a:tc>
+                  <a:txBody>
+                    <a:bodyPr/>
+                    <a:lstStyle/>
+                    <a:p>
+                      <a:pPr algn="l"/>
+                      <a:r>
+                        <a:rPr sz="1150" b="1">
+                          <a:solidFill>
+                            <a:srgbClr val="FFFFFF"/>
+                          </a:solidFill>
+                        </a:rPr>
+                        <a:t>Term</a:t>
+                      </a:r>
+                    </a:p>
+                  </a:txBody>
+                  <a:tcPr anchor="ctr" marL="73152" marR="73152" marT="27432" marB="27432">
+                    <a:solidFill>
+                      <a:srgbClr val="0B213F"/>
+                    </a:solidFill>
+                  </a:tcPr>
+                </a:tc>
+                <a:tc>
+                  <a:txBody>
+                    <a:bodyPr/>
+                    <a:lstStyle/>
+                    <a:p>
+                      <a:pPr algn="l"/>
+                      <a:r>
+                        <a:rPr sz="1150" b="1">
+                          <a:solidFill>
+                            <a:srgbClr val="FFFFFF"/>
+                          </a:solidFill>
+                        </a:rPr>
+                        <a:t>Meaning</a:t>
+                      </a:r>
+                    </a:p>
+                  </a:txBody>
+                  <a:tcPr anchor="ctr" marL="73152" marR="73152" marT="27432" marB="27432">
+                    <a:solidFill>
+                      <a:srgbClr val="0B213F"/>
+                    </a:solidFill>
+                  </a:tcPr>
+                </a:tc>
+              </a:tr>
+              <a:tr h="457200">
+                <a:tc>
+                  <a:txBody>
+                    <a:bodyPr/>
+                    <a:lstStyle/>
+                    <a:p>
+                      <a:pPr algn="l"/>
+                      <a:r>
+                        <a:rPr sz="1050" b="1">
+                          <a:solidFill>
+                            <a:srgbClr val="0B213F"/>
+                          </a:solidFill>
+                        </a:rPr>
+                        <a:t>Forward-only migration</a:t>
+                      </a:r>
+                    </a:p>
+                  </a:txBody>
+                  <a:tcPr anchor="ctr" marL="73152" marR="73152" marT="27432" marB="27432">
+                    <a:solidFill>
+                      <a:srgbClr val="FFFFFF"/>
+                    </a:solidFill>
+                  </a:tcPr>
+                </a:tc>
+                <a:tc>
+                  <a:txBody>
+                    <a:bodyPr/>
+                    <a:lstStyle/>
+                    <a:p>
+                      <a:pPr algn="l"/>
+                      <a:r>
+                        <a:rPr sz="1050" b="0">
+                          <a:solidFill>
+                            <a:srgbClr val="0B213F"/>
+                          </a:solidFill>
+                        </a:rPr>
+                        <a:t>A database schema change that is only ever applied moving forward in time; past migrations are never rewritten</a:t>
+                      </a:r>
+                    </a:p>
+                  </a:txBody>
+                  <a:tcPr anchor="ctr" marL="73152" marR="73152" marT="27432" marB="27432">
+                    <a:solidFill>
+                      <a:srgbClr val="FFFFFF"/>
+                    </a:solidFill>
+                  </a:tcPr>
+                </a:tc>
+              </a:tr>
+              <a:tr h="457200">
+                <a:tc>
+                  <a:txBody>
+                    <a:bodyPr/>
+                    <a:lstStyle/>
+                    <a:p>
+                      <a:pPr algn="l"/>
+                      <a:r>
+                        <a:rPr sz="1050" b="1">
+                          <a:solidFill>
+                            <a:srgbClr val="0B213F"/>
+                          </a:solidFill>
+                        </a:rPr>
+                        <a:t>BFF (Backend-for-Frontend)</a:t>
+                      </a:r>
+                    </a:p>
+                  </a:txBody>
+                  <a:tcPr anchor="ctr" marL="73152" marR="73152" marT="27432" marB="27432">
+                    <a:solidFill>
+                      <a:srgbClr val="F4F6F8"/>
+                    </a:solidFill>
+                  </a:tcPr>
+                </a:tc>
+                <a:tc>
+                  <a:txBody>
+                    <a:bodyPr/>
+                    <a:lstStyle/>
+                    <a:p>
+                      <a:pPr algn="l"/>
+                      <a:r>
+                        <a:rPr sz="1050" b="0">
+                          <a:solidFill>
+                            <a:srgbClr val="0B213F"/>
+                          </a:solidFill>
+                        </a:rPr>
+                        <a:t>A server-side layer placed between a browser and backend API to tailor and forward requests on the browser's behalf</a:t>
+                      </a:r>
+                    </a:p>
+                  </a:txBody>
+                  <a:tcPr anchor="ctr" marL="73152" marR="73152" marT="27432" marB="27432">
+                    <a:solidFill>
+                      <a:srgbClr val="F4F6F8"/>
+                    </a:solidFill>
+                  </a:tcPr>
+                </a:tc>
+              </a:tr>
+              <a:tr h="457200">
+                <a:tc>
+                  <a:txBody>
+                    <a:bodyPr/>
+                    <a:lstStyle/>
+                    <a:p>
+                      <a:pPr algn="l"/>
+                      <a:r>
+                        <a:rPr sz="1050" b="1">
+                          <a:solidFill>
+                            <a:srgbClr val="0B213F"/>
+                          </a:solidFill>
+                        </a:rPr>
+                        <a:t>OIDC (OpenID Connect)</a:t>
+                      </a:r>
+                    </a:p>
+                  </a:txBody>
+                  <a:tcPr anchor="ctr" marL="73152" marR="73152" marT="27432" marB="27432">
+                    <a:solidFill>
+                      <a:srgbClr val="FFFFFF"/>
+                    </a:solidFill>
+                  </a:tcPr>
+                </a:tc>
+                <a:tc>
+                  <a:txBody>
+                    <a:bodyPr/>
+                    <a:lstStyle/>
+                    <a:p>
+                      <a:pPr algn="l"/>
+                      <a:r>
+                        <a:rPr sz="1050" b="0">
+                          <a:solidFill>
+                            <a:srgbClr val="0B213F"/>
+                          </a:solidFill>
+                        </a:rPr>
+                        <a:t>An identity protocol used here so GitHub Actions can authenticate to Azure without storing long-lived credentials</a:t>
+                      </a:r>
+                    </a:p>
+                  </a:txBody>
+                  <a:tcPr anchor="ctr" marL="73152" marR="73152" marT="27432" marB="27432">
+                    <a:solidFill>
+                      <a:srgbClr val="FFFFFF"/>
+                    </a:solidFill>
+                  </a:tcPr>
+                </a:tc>
+              </a:tr>
+              <a:tr h="457200">
+                <a:tc>
+                  <a:txBody>
+                    <a:bodyPr/>
+                    <a:lstStyle/>
+                    <a:p>
+                      <a:pPr algn="l"/>
+                      <a:r>
+                        <a:rPr sz="1050" b="1">
+                          <a:solidFill>
+                            <a:srgbClr val="0B213F"/>
+                          </a:solidFill>
+                        </a:rPr>
+                        <a:t>Workload identity federation</a:t>
+                      </a:r>
+                    </a:p>
+                  </a:txBody>
+                  <a:tcPr anchor="ctr" marL="73152" marR="73152" marT="27432" marB="27432">
+                    <a:solidFill>
+                      <a:srgbClr val="F4F6F8"/>
+                    </a:solidFill>
+                  </a:tcPr>
+                </a:tc>
+                <a:tc>
+                  <a:txBody>
+                    <a:bodyPr/>
+                    <a:lstStyle/>
+                    <a:p>
+                      <a:pPr algn="l"/>
+                      <a:r>
+                        <a:rPr sz="1050" b="0">
+                          <a:solidFill>
+                            <a:srgbClr val="0B213F"/>
+                          </a:solidFill>
+                        </a:rPr>
+                        <a:t>A mechanism that lets an external system (like GitHub) exchange its own identity for a cloud provider's identity, without a shared secret</a:t>
+                      </a:r>
+                    </a:p>
+                  </a:txBody>
+                  <a:tcPr anchor="ctr" marL="73152" marR="73152" marT="27432" marB="27432">
+                    <a:solidFill>
+                      <a:srgbClr val="F4F6F8"/>
+                    </a:solidFill>
+                  </a:tcPr>
+                </a:tc>
+              </a:tr>
+              <a:tr h="457200">
+                <a:tc>
+                  <a:txBody>
+                    <a:bodyPr/>
+                    <a:lstStyle/>
+                    <a:p>
+                      <a:pPr algn="l"/>
+                      <a:r>
+                        <a:rPr sz="1050" b="1">
+                          <a:solidFill>
+                            <a:srgbClr val="0B213F"/>
+                          </a:solidFill>
+                        </a:rPr>
+                        <a:t>Blue/green deployment</a:t>
+                      </a:r>
+                    </a:p>
+                  </a:txBody>
+                  <a:tcPr anchor="ctr" marL="73152" marR="73152" marT="27432" marB="27432">
+                    <a:solidFill>
+                      <a:srgbClr val="FFFFFF"/>
+                    </a:solidFill>
+                  </a:tcPr>
+                </a:tc>
+                <a:tc>
+                  <a:txBody>
+                    <a:bodyPr/>
+                    <a:lstStyle/>
+                    <a:p>
+                      <a:pPr algn="l"/>
+                      <a:r>
+                        <a:rPr sz="1050" b="0">
+                          <a:solidFill>
+                            <a:srgbClr val="0B213F"/>
+                          </a:solidFill>
+                        </a:rPr>
+                        <a:t>A release technique that runs two versions of an application side by side and shifts traffic from the old to the new version</a:t>
+                      </a:r>
+                    </a:p>
+                  </a:txBody>
+                  <a:tcPr anchor="ctr" marL="73152" marR="73152" marT="27432" marB="27432">
+                    <a:solidFill>
+                      <a:srgbClr val="FFFFFF"/>
+                    </a:solidFill>
+                  </a:tcPr>
+                </a:tc>
+              </a:tr>
+              <a:tr h="457200">
+                <a:tc>
+                  <a:txBody>
+                    <a:bodyPr/>
+                    <a:lstStyle/>
+                    <a:p>
+                      <a:pPr algn="l"/>
+                      <a:r>
+                        <a:rPr sz="1050" b="1">
+                          <a:solidFill>
+                            <a:srgbClr val="0B213F"/>
+                          </a:solidFill>
+                        </a:rPr>
+                        <a:t>Canary deployment</a:t>
+                      </a:r>
+                    </a:p>
+                  </a:txBody>
+                  <a:tcPr anchor="ctr" marL="73152" marR="73152" marT="27432" marB="27432">
+                    <a:solidFill>
+                      <a:srgbClr val="F4F6F8"/>
+                    </a:solidFill>
+                  </a:tcPr>
+                </a:tc>
+                <a:tc>
+                  <a:txBody>
+                    <a:bodyPr/>
+                    <a:lstStyle/>
+                    <a:p>
+                      <a:pPr algn="l"/>
+                      <a:r>
+                        <a:rPr sz="1050" b="0">
+                          <a:solidFill>
+                            <a:srgbClr val="0B213F"/>
+                          </a:solidFill>
+                        </a:rPr>
+                        <a:t>A release technique that gradually shifts a small percentage of traffic to a new version before a full rollout</a:t>
+                      </a:r>
+                    </a:p>
+                  </a:txBody>
+                  <a:tcPr anchor="ctr" marL="73152" marR="73152" marT="27432" marB="27432">
+                    <a:solidFill>
+                      <a:srgbClr val="F4F6F8"/>
+                    </a:solidFill>
+                  </a:tcPr>
+                </a:tc>
+              </a:tr>
+              <a:tr h="457200">
+                <a:tc>
+                  <a:txBody>
+                    <a:bodyPr/>
+                    <a:lstStyle/>
+                    <a:p>
+                      <a:pPr algn="l"/>
+                      <a:r>
+                        <a:rPr sz="1050" b="1">
+                          <a:solidFill>
+                            <a:srgbClr val="0B213F"/>
+                          </a:solidFill>
+                        </a:rPr>
+                        <a:t>RPO (Recovery Point Objective)</a:t>
+                      </a:r>
+                    </a:p>
+                  </a:txBody>
+                  <a:tcPr anchor="ctr" marL="73152" marR="73152" marT="27432" marB="27432">
+                    <a:solidFill>
+                      <a:srgbClr val="FFFFFF"/>
+                    </a:solidFill>
+                  </a:tcPr>
+                </a:tc>
+                <a:tc>
+                  <a:txBody>
+                    <a:bodyPr/>
+                    <a:lstStyle/>
+                    <a:p>
+                      <a:pPr algn="l"/>
+                      <a:r>
+                        <a:rPr sz="1050" b="0">
+                          <a:solidFill>
+                            <a:srgbClr val="0B213F"/>
+                          </a:solidFill>
+                        </a:rPr>
+                        <a:t>The maximum acceptable amount of data loss, measured in time, after an incident</a:t>
+                      </a:r>
+                    </a:p>
+                  </a:txBody>
+                  <a:tcPr anchor="ctr" marL="73152" marR="73152" marT="27432" marB="27432">
+                    <a:solidFill>
+                      <a:srgbClr val="FFFFFF"/>
+                    </a:solidFill>
+                  </a:tcPr>
+                </a:tc>
+              </a:tr>
+              <a:tr h="457200">
+                <a:tc>
+                  <a:txBody>
+                    <a:bodyPr/>
+                    <a:lstStyle/>
+                    <a:p>
+                      <a:pPr algn="l"/>
+                      <a:r>
+                        <a:rPr sz="1050" b="1">
+                          <a:solidFill>
+                            <a:srgbClr val="0B213F"/>
+                          </a:solidFill>
+                        </a:rPr>
+                        <a:t>RTO (Recovery Time Objective)</a:t>
+                      </a:r>
+                    </a:p>
+                  </a:txBody>
+                  <a:tcPr anchor="ctr" marL="73152" marR="73152" marT="27432" marB="27432">
+                    <a:solidFill>
+                      <a:srgbClr val="F4F6F8"/>
+                    </a:solidFill>
+                  </a:tcPr>
+                </a:tc>
+                <a:tc>
+                  <a:txBody>
+                    <a:bodyPr/>
+                    <a:lstStyle/>
+                    <a:p>
+                      <a:pPr algn="l"/>
+                      <a:r>
+                        <a:rPr sz="1050" b="0">
+                          <a:solidFill>
+                            <a:srgbClr val="0B213F"/>
+                          </a:solidFill>
+                        </a:rPr>
+                        <a:t>The maximum acceptable time to restore service after an incident</a:t>
+                      </a:r>
+                    </a:p>
+                  </a:txBody>
+                  <a:tcPr anchor="ctr" marL="73152" marR="73152" marT="27432" marB="27432">
+                    <a:solidFill>
+                      <a:srgbClr val="F4F6F8"/>
+                    </a:solidFill>
+                  </a:tcPr>
+                </a:tc>
+              </a:tr>
+              <a:tr h="457200">
+                <a:tc>
+                  <a:txBody>
+                    <a:bodyPr/>
+                    <a:lstStyle/>
+                    <a:p>
+                      <a:pPr algn="l"/>
+                      <a:r>
+                        <a:rPr sz="1050" b="1">
+                          <a:solidFill>
+                            <a:srgbClr val="0B213F"/>
+                          </a:solidFill>
+                        </a:rPr>
+                        <a:t>SLO (Service Level Objective)</a:t>
+                      </a:r>
+                    </a:p>
+                  </a:txBody>
+                  <a:tcPr anchor="ctr" marL="73152" marR="73152" marT="27432" marB="27432">
+                    <a:solidFill>
+                      <a:srgbClr val="FFFFFF"/>
+                    </a:solidFill>
+                  </a:tcPr>
+                </a:tc>
+                <a:tc>
+                  <a:txBody>
+                    <a:bodyPr/>
+                    <a:lstStyle/>
+                    <a:p>
+                      <a:pPr algn="l"/>
+                      <a:r>
+                        <a:rPr sz="1050" b="0">
+                          <a:solidFill>
+                            <a:srgbClr val="0B213F"/>
+                          </a:solidFill>
+                        </a:rPr>
+                        <a:t>A measurable reliability target (e.g., latency, uptime) that a team commits to internally</a:t>
+                      </a:r>
+                    </a:p>
+                  </a:txBody>
+                  <a:tcPr anchor="ctr" marL="73152" marR="73152" marT="27432" marB="27432">
+                    <a:solidFill>
+                      <a:srgbClr val="FFFFFF"/>
+                    </a:solidFill>
+                  </a:tcPr>
+                </a:tc>
+              </a:tr>
+              <a:tr h="457200">
+                <a:tc>
+                  <a:txBody>
+                    <a:bodyPr/>
+                    <a:lstStyle/>
+                    <a:p>
+                      <a:pPr algn="l"/>
+                      <a:r>
+                        <a:rPr sz="1050" b="1">
+                          <a:solidFill>
+                            <a:srgbClr val="0B213F"/>
+                          </a:solidFill>
+                        </a:rPr>
+                        <a:t>ADR (Architecture Decision Record)</a:t>
+                      </a:r>
+                    </a:p>
+                  </a:txBody>
+                  <a:tcPr anchor="ctr" marL="73152" marR="73152" marT="27432" marB="27432">
+                    <a:solidFill>
+                      <a:srgbClr val="F4F6F8"/>
+                    </a:solidFill>
+                  </a:tcPr>
+                </a:tc>
+                <a:tc>
+                  <a:txBody>
+                    <a:bodyPr/>
+                    <a:lstStyle/>
+                    <a:p>
+                      <a:pPr algn="l"/>
+                      <a:r>
+                        <a:rPr sz="1050" b="0">
+                          <a:solidFill>
+                            <a:srgbClr val="0B213F"/>
+                          </a:solidFill>
+                        </a:rPr>
+                        <a:t>A short document capturing one architecture decision, its context, and its consequences</a:t>
+                      </a:r>
+                    </a:p>
+                  </a:txBody>
+                  <a:tcPr anchor="ctr" marL="73152" marR="73152" marT="27432" marB="27432">
+                    <a:solidFill>
+                      <a:srgbClr val="F4F6F8"/>
+                    </a:solidFill>
+                  </a:tcPr>
+                </a:tc>
+              </a:tr>
+            </a:tbl>
+          </a:graphicData>
+        </a:graphic>
+      </p:graphicFrame>
+      <p:sp>
+        <p:nvSpPr>
+          <p:cNvPr id="7" name="TextBox 6"/>
+          <p:cNvSpPr txBox="1"/>
+          <p:nvPr/>
+        </p:nvSpPr>
+        <p:spPr>
+          <a:xfrm>
+            <a:off x="548640" y="6446520"/>
+            <a:ext cx="5486400" cy="274320"/>
+          </a:xfrm>
+          <a:prstGeom prst="rect">
+            <a:avLst/>
+          </a:prstGeom>
+          <a:noFill/>
+        </p:spPr>
+        <p:txBody>
+          <a:bodyPr wrap="square">
+            <a:spAutoFit/>
+          </a:bodyPr>
+          <a:lstStyle/>
+          <a:p>
+            <a:pPr algn="l"/>
+            <a:r>
+              <a:rPr sz="900" b="0" i="0">
+                <a:solidFill>
+                  <a:srgbClr val="555F6B"/>
+                </a:solidFill>
+                <a:latin typeface="Calibri"/>
+              </a:rPr>
+              <a:t>KEYFORTA — Architecture Overview · Confidential</a:t>
+            </a:r>
+          </a:p>
+        </p:txBody>
+      </p:sp>
+      <p:sp>
+        <p:nvSpPr>
+          <p:cNvPr id="8" name="TextBox 7"/>
+          <p:cNvSpPr txBox="1"/>
+          <p:nvPr/>
+        </p:nvSpPr>
+        <p:spPr>
+          <a:xfrm>
+            <a:off x="10911535" y="6446520"/>
+            <a:ext cx="822960" cy="274320"/>
+          </a:xfrm>
+          <a:prstGeom prst="rect">
+            <a:avLst/>
+          </a:prstGeom>
+          <a:noFill/>
+        </p:spPr>
+        <p:txBody>
+          <a:bodyPr wrap="square">
+            <a:spAutoFit/>
+          </a:bodyPr>
+          <a:lstStyle/>
+          <a:p>
+            <a:pPr algn="r"/>
+            <a:r>
+              <a:rPr sz="900" b="0" i="0">
+                <a:solidFill>
+                  <a:srgbClr val="555F6B"/>
+                </a:solidFill>
+                <a:latin typeface="Calibri"/>
+              </a:rPr>
+              <a:t>12</a:t>
+            </a:r>
+          </a:p>
+        </p:txBody>
+      </p:sp>
+    </p:spTree>
+  </p:cSld>
+  <p:clrMapOvr>
+    <a:masterClrMapping/>
+  </p:clrMapOvr>
+</p:sld>
+</file>
+
+<file path=ppt/slides/slide13.xml><?xml version="1.0" encoding="utf-8"?>
+<p:sld xmlns:a="http://schemas.openxmlformats.org/drawingml/2006/main" xmlns:p="http://schemas.openxmlformats.org/presentationml/2006/main" xmlns:r="http://schemas.openxmlformats.org/officeDocument/2006/relationships">
+  <p:cSld>
+    <p:bg>
+      <p:bgPr>
+        <a:solidFill>
+          <a:srgbClr val="FFFFFF"/>
+        </a:solidFill>
+        <a:effectLst/>
+      </p:bgPr>
+    </p:bg>
+    <p:spTree>
+      <p:nvGrpSpPr>
+        <p:cNvPr id="1" name=""/>
+        <p:cNvGrpSpPr/>
+        <p:nvPr/>
+      </p:nvGrpSpPr>
+      <p:grpSpPr/>
+      <p:sp>
+        <p:nvSpPr>
+          <p:cNvPr id="2" name="Rectangle 1"/>
+          <p:cNvSpPr/>
+          <p:nvPr/>
+        </p:nvSpPr>
+        <p:spPr>
+          <a:xfrm>
+            <a:off x="0" y="0"/>
+            <a:ext cx="12191695" cy="128016"/>
+          </a:xfrm>
+          <a:prstGeom prst="rect">
+            <a:avLst/>
+          </a:prstGeom>
+          <a:solidFill>
+            <a:srgbClr val="C99A2E"/>
+          </a:solidFill>
+          <a:ln>
+            <a:noFill/>
+          </a:ln>
+          <a:effectLst/>
+        </p:spPr>
+        <p:style>
+          <a:lnRef idx="1">
+            <a:schemeClr val="accent1"/>
+          </a:lnRef>
+          <a:fillRef idx="3">
+            <a:schemeClr val="accent1"/>
+          </a:fillRef>
+          <a:effectRef idx="2">
+            <a:schemeClr val="accent1"/>
+          </a:effectRef>
+          <a:fontRef idx="minor">
+            <a:schemeClr val="lt1"/>
+          </a:fontRef>
+        </p:style>
+        <p:txBody>
+          <a:bodyPr rtlCol="0" anchor="ctr"/>
+          <a:lstStyle/>
+          <a:p>
+            <a:pPr algn="ctr"/>
+          </a:p>
+        </p:txBody>
+      </p:sp>
+      <p:sp>
+        <p:nvSpPr>
+          <p:cNvPr id="3" name="TextBox 2"/>
+          <p:cNvSpPr txBox="1"/>
+          <p:nvPr/>
+        </p:nvSpPr>
+        <p:spPr>
+          <a:xfrm>
+            <a:off x="548640" y="256032"/>
+            <a:ext cx="10058400" cy="320040"/>
+          </a:xfrm>
+          <a:prstGeom prst="rect">
+            <a:avLst/>
+          </a:prstGeom>
+          <a:noFill/>
+        </p:spPr>
+        <p:txBody>
+          <a:bodyPr wrap="square">
+            <a:spAutoFit/>
+          </a:bodyPr>
+          <a:lstStyle/>
+          <a:p>
+            <a:pPr algn="l"/>
+            <a:r>
+              <a:rPr sz="1300" b="1" i="0">
+                <a:solidFill>
+                  <a:srgbClr val="0E7C86"/>
+                </a:solidFill>
+                <a:latin typeface="Calibri"/>
+              </a:rPr>
+              <a:t>REFERENCE</a:t>
+            </a:r>
+          </a:p>
+        </p:txBody>
+      </p:sp>
+      <p:sp>
+        <p:nvSpPr>
+          <p:cNvPr id="4" name="TextBox 3"/>
+          <p:cNvSpPr txBox="1"/>
+          <p:nvPr/>
+        </p:nvSpPr>
+        <p:spPr>
+          <a:xfrm>
+            <a:off x="548640" y="548640"/>
+            <a:ext cx="10972800" cy="640080"/>
+          </a:xfrm>
+          <a:prstGeom prst="rect">
+            <a:avLst/>
+          </a:prstGeom>
+          <a:noFill/>
+        </p:spPr>
+        <p:txBody>
+          <a:bodyPr wrap="square">
+            <a:spAutoFit/>
+          </a:bodyPr>
+          <a:lstStyle/>
+          <a:p>
+            <a:pPr algn="l"/>
+            <a:r>
+              <a:rPr sz="2600" b="1" i="0">
+                <a:solidFill>
+                  <a:srgbClr val="0B213F"/>
+                </a:solidFill>
+                <a:latin typeface="Calibri"/>
+              </a:rPr>
+              <a:t>Abbreviations</a:t>
+            </a:r>
+          </a:p>
+        </p:txBody>
+      </p:sp>
+      <p:sp>
+        <p:nvSpPr>
+          <p:cNvPr id="5" name="Rectangle 4"/>
+          <p:cNvSpPr/>
+          <p:nvPr/>
+        </p:nvSpPr>
+        <p:spPr>
+          <a:xfrm>
+            <a:off x="548640" y="1170432"/>
+            <a:ext cx="1005840" cy="41148"/>
+          </a:xfrm>
+          <a:prstGeom prst="rect">
+            <a:avLst/>
+          </a:prstGeom>
+          <a:solidFill>
+            <a:srgbClr val="C99A2E"/>
+          </a:solidFill>
+          <a:ln>
+            <a:noFill/>
+          </a:ln>
+          <a:effectLst/>
+        </p:spPr>
+        <p:style>
+          <a:lnRef idx="1">
+            <a:schemeClr val="accent1"/>
+          </a:lnRef>
+          <a:fillRef idx="3">
+            <a:schemeClr val="accent1"/>
+          </a:fillRef>
+          <a:effectRef idx="2">
+            <a:schemeClr val="accent1"/>
+          </a:effectRef>
+          <a:fontRef idx="minor">
+            <a:schemeClr val="lt1"/>
+          </a:fontRef>
+        </p:style>
+        <p:txBody>
+          <a:bodyPr rtlCol="0" anchor="ctr"/>
+          <a:lstStyle/>
+          <a:p>
+            <a:pPr algn="ctr"/>
+          </a:p>
+        </p:txBody>
+      </p:sp>
+      <p:graphicFrame>
+        <p:nvGraphicFramePr>
+          <p:cNvPr id="6" name="Table 5"/>
+          <p:cNvGraphicFramePr>
+            <a:graphicFrameLocks noGrp="1"/>
+          </p:cNvGraphicFramePr>
+          <p:nvPr/>
+        </p:nvGraphicFramePr>
+        <p:xfrm>
+          <a:off x="548640" y="1417320"/>
+          <a:ext cx="5394960" cy="4828032"/>
+        </p:xfrm>
+        <a:graphic>
+          <a:graphicData uri="http://schemas.openxmlformats.org/drawingml/2006/table">
+            <a:tbl>
+              <a:tblPr firstRow="1" bandRow="1">
+                <a:tableStyleId>{5C22544A-7EE6-4342-B048-85BDC9FD1C3A}</a:tableStyleId>
+              </a:tblPr>
+              <a:tblGrid>
+                <a:gridCol w="1463040"/>
+                <a:gridCol w="3931920"/>
+              </a:tblGrid>
+              <a:tr h="438912">
+                <a:tc>
+                  <a:txBody>
+                    <a:bodyPr/>
+                    <a:lstStyle/>
+                    <a:p>
+                      <a:pPr algn="l"/>
+                      <a:r>
+                        <a:rPr sz="1200" b="1">
+                          <a:solidFill>
+                            <a:srgbClr val="FFFFFF"/>
+                          </a:solidFill>
+                        </a:rPr>
+                        <a:t>Abbrev.</a:t>
+                      </a:r>
+                    </a:p>
+                  </a:txBody>
+                  <a:tcPr anchor="ctr" marL="73152" marR="73152" marT="27432" marB="27432">
+                    <a:solidFill>
+                      <a:srgbClr val="0B213F"/>
+                    </a:solidFill>
+                  </a:tcPr>
+                </a:tc>
+                <a:tc>
+                  <a:txBody>
+                    <a:bodyPr/>
+                    <a:lstStyle/>
+                    <a:p>
+                      <a:pPr algn="l"/>
+                      <a:r>
+                        <a:rPr sz="1200" b="1">
+                          <a:solidFill>
+                            <a:srgbClr val="FFFFFF"/>
+                          </a:solidFill>
+                        </a:rPr>
+                        <a:t>Expansion</a:t>
+                      </a:r>
+                    </a:p>
+                  </a:txBody>
+                  <a:tcPr anchor="ctr" marL="73152" marR="73152" marT="27432" marB="27432">
+                    <a:solidFill>
+                      <a:srgbClr val="0B213F"/>
+                    </a:solidFill>
+                  </a:tcPr>
+                </a:tc>
+              </a:tr>
+              <a:tr h="438912">
+                <a:tc>
+                  <a:txBody>
+                    <a:bodyPr/>
+                    <a:lstStyle/>
+                    <a:p>
+                      <a:pPr algn="l"/>
+                      <a:r>
+                        <a:rPr sz="1100" b="1">
+                          <a:solidFill>
+                            <a:srgbClr val="0E7C86"/>
+                          </a:solidFill>
+                        </a:rPr>
+                        <a:t>API</a:t>
+                      </a:r>
+                    </a:p>
+                  </a:txBody>
+                  <a:tcPr anchor="ctr" marL="73152" marR="73152" marT="27432" marB="27432">
+                    <a:solidFill>
+                      <a:srgbClr val="FFFFFF"/>
+                    </a:solidFill>
+                  </a:tcPr>
+                </a:tc>
+                <a:tc>
+                  <a:txBody>
+                    <a:bodyPr/>
+                    <a:lstStyle/>
+                    <a:p>
+                      <a:pPr algn="l"/>
+                      <a:r>
+                        <a:rPr sz="1100" b="0">
+                          <a:solidFill>
+                            <a:srgbClr val="0B213F"/>
+                          </a:solidFill>
+                        </a:rPr>
+                        <a:t>Application Programming Interface</a:t>
+                      </a:r>
+                    </a:p>
+                  </a:txBody>
+                  <a:tcPr anchor="ctr" marL="73152" marR="73152" marT="27432" marB="27432">
+                    <a:solidFill>
+                      <a:srgbClr val="FFFFFF"/>
+                    </a:solidFill>
+                  </a:tcPr>
+                </a:tc>
+              </a:tr>
+              <a:tr h="438912">
+                <a:tc>
+                  <a:txBody>
+                    <a:bodyPr/>
+                    <a:lstStyle/>
+                    <a:p>
+                      <a:pPr algn="l"/>
+                      <a:r>
+                        <a:rPr sz="1100" b="1">
+                          <a:solidFill>
+                            <a:srgbClr val="0E7C86"/>
+                          </a:solidFill>
+                        </a:rPr>
+                        <a:t>BFF</a:t>
+                      </a:r>
+                    </a:p>
+                  </a:txBody>
+                  <a:tcPr anchor="ctr" marL="73152" marR="73152" marT="27432" marB="27432">
+                    <a:solidFill>
+                      <a:srgbClr val="F4F6F8"/>
+                    </a:solidFill>
+                  </a:tcPr>
+                </a:tc>
+                <a:tc>
+                  <a:txBody>
+                    <a:bodyPr/>
+                    <a:lstStyle/>
+                    <a:p>
+                      <a:pPr algn="l"/>
+                      <a:r>
+                        <a:rPr sz="1100" b="0">
+                          <a:solidFill>
+                            <a:srgbClr val="0B213F"/>
+                          </a:solidFill>
+                        </a:rPr>
+                        <a:t>Backend-for-Frontend</a:t>
+                      </a:r>
+                    </a:p>
+                  </a:txBody>
+                  <a:tcPr anchor="ctr" marL="73152" marR="73152" marT="27432" marB="27432">
+                    <a:solidFill>
+                      <a:srgbClr val="F4F6F8"/>
+                    </a:solidFill>
+                  </a:tcPr>
+                </a:tc>
+              </a:tr>
+              <a:tr h="438912">
+                <a:tc>
+                  <a:txBody>
+                    <a:bodyPr/>
+                    <a:lstStyle/>
+                    <a:p>
+                      <a:pPr algn="l"/>
+                      <a:r>
+                        <a:rPr sz="1100" b="1">
+                          <a:solidFill>
+                            <a:srgbClr val="0E7C86"/>
+                          </a:solidFill>
+                        </a:rPr>
+                        <a:t>CDN</a:t>
+                      </a:r>
+                    </a:p>
+                  </a:txBody>
+                  <a:tcPr anchor="ctr" marL="73152" marR="73152" marT="27432" marB="27432">
+                    <a:solidFill>
+                      <a:srgbClr val="FFFFFF"/>
+                    </a:solidFill>
+                  </a:tcPr>
+                </a:tc>
+                <a:tc>
+                  <a:txBody>
+                    <a:bodyPr/>
+                    <a:lstStyle/>
+                    <a:p>
+                      <a:pPr algn="l"/>
+                      <a:r>
+                        <a:rPr sz="1100" b="0">
+                          <a:solidFill>
+                            <a:srgbClr val="0B213F"/>
+                          </a:solidFill>
+                        </a:rPr>
+                        <a:t>Content Delivery Network</a:t>
+                      </a:r>
+                    </a:p>
+                  </a:txBody>
+                  <a:tcPr anchor="ctr" marL="73152" marR="73152" marT="27432" marB="27432">
+                    <a:solidFill>
+                      <a:srgbClr val="FFFFFF"/>
+                    </a:solidFill>
+                  </a:tcPr>
+                </a:tc>
+              </a:tr>
+              <a:tr h="438912">
+                <a:tc>
+                  <a:txBody>
+                    <a:bodyPr/>
+                    <a:lstStyle/>
+                    <a:p>
+                      <a:pPr algn="l"/>
+                      <a:r>
+                        <a:rPr sz="1100" b="1">
+                          <a:solidFill>
+                            <a:srgbClr val="0E7C86"/>
+                          </a:solidFill>
+                        </a:rPr>
+                        <a:t>CI/CD</a:t>
+                      </a:r>
+                    </a:p>
+                  </a:txBody>
+                  <a:tcPr anchor="ctr" marL="73152" marR="73152" marT="27432" marB="27432">
+                    <a:solidFill>
+                      <a:srgbClr val="F4F6F8"/>
+                    </a:solidFill>
+                  </a:tcPr>
+                </a:tc>
+                <a:tc>
+                  <a:txBody>
+                    <a:bodyPr/>
+                    <a:lstStyle/>
+                    <a:p>
+                      <a:pPr algn="l"/>
+                      <a:r>
+                        <a:rPr sz="1100" b="0">
+                          <a:solidFill>
+                            <a:srgbClr val="0B213F"/>
+                          </a:solidFill>
+                        </a:rPr>
+                        <a:t>Continuous Integration / Continuous Deployment</a:t>
+                      </a:r>
+                    </a:p>
+                  </a:txBody>
+                  <a:tcPr anchor="ctr" marL="73152" marR="73152" marT="27432" marB="27432">
+                    <a:solidFill>
+                      <a:srgbClr val="F4F6F8"/>
+                    </a:solidFill>
+                  </a:tcPr>
+                </a:tc>
+              </a:tr>
+              <a:tr h="438912">
+                <a:tc>
+                  <a:txBody>
+                    <a:bodyPr/>
+                    <a:lstStyle/>
+                    <a:p>
+                      <a:pPr algn="l"/>
+                      <a:r>
+                        <a:rPr sz="1100" b="1">
+                          <a:solidFill>
+                            <a:srgbClr val="0E7C86"/>
+                          </a:solidFill>
+                        </a:rPr>
+                        <a:t>CORS</a:t>
+                      </a:r>
+                    </a:p>
+                  </a:txBody>
+                  <a:tcPr anchor="ctr" marL="73152" marR="73152" marT="27432" marB="27432">
+                    <a:solidFill>
+                      <a:srgbClr val="FFFFFF"/>
+                    </a:solidFill>
+                  </a:tcPr>
+                </a:tc>
+                <a:tc>
+                  <a:txBody>
+                    <a:bodyPr/>
+                    <a:lstStyle/>
+                    <a:p>
+                      <a:pPr algn="l"/>
+                      <a:r>
+                        <a:rPr sz="1100" b="0">
+                          <a:solidFill>
+                            <a:srgbClr val="0B213F"/>
+                          </a:solidFill>
+                        </a:rPr>
+                        <a:t>Cross-Origin Resource Sharing</a:t>
+                      </a:r>
+                    </a:p>
+                  </a:txBody>
+                  <a:tcPr anchor="ctr" marL="73152" marR="73152" marT="27432" marB="27432">
+                    <a:solidFill>
+                      <a:srgbClr val="FFFFFF"/>
+                    </a:solidFill>
+                  </a:tcPr>
+                </a:tc>
+              </a:tr>
+              <a:tr h="438912">
+                <a:tc>
+                  <a:txBody>
+                    <a:bodyPr/>
+                    <a:lstStyle/>
+                    <a:p>
+                      <a:pPr algn="l"/>
+                      <a:r>
+                        <a:rPr sz="1100" b="1">
+                          <a:solidFill>
+                            <a:srgbClr val="0E7C86"/>
+                          </a:solidFill>
+                        </a:rPr>
+                        <a:t>DRC</a:t>
+                      </a:r>
+                    </a:p>
+                  </a:txBody>
+                  <a:tcPr anchor="ctr" marL="73152" marR="73152" marT="27432" marB="27432">
+                    <a:solidFill>
+                      <a:srgbClr val="F4F6F8"/>
+                    </a:solidFill>
+                  </a:tcPr>
+                </a:tc>
+                <a:tc>
+                  <a:txBody>
+                    <a:bodyPr/>
+                    <a:lstStyle/>
+                    <a:p>
+                      <a:pPr algn="l"/>
+                      <a:r>
+                        <a:rPr sz="1100" b="0">
+                          <a:solidFill>
+                            <a:srgbClr val="0B213F"/>
+                          </a:solidFill>
+                        </a:rPr>
+                        <a:t>Democratic Republic of the Congo</a:t>
+                      </a:r>
+                    </a:p>
+                  </a:txBody>
+                  <a:tcPr anchor="ctr" marL="73152" marR="73152" marT="27432" marB="27432">
+                    <a:solidFill>
+                      <a:srgbClr val="F4F6F8"/>
+                    </a:solidFill>
+                  </a:tcPr>
+                </a:tc>
+              </a:tr>
+              <a:tr h="438912">
+                <a:tc>
+                  <a:txBody>
+                    <a:bodyPr/>
+                    <a:lstStyle/>
+                    <a:p>
+                      <a:pPr algn="l"/>
+                      <a:r>
+                        <a:rPr sz="1100" b="1">
+                          <a:solidFill>
+                            <a:srgbClr val="0E7C86"/>
+                          </a:solidFill>
+                        </a:rPr>
+                        <a:t>HA</a:t>
+                      </a:r>
+                    </a:p>
+                  </a:txBody>
+                  <a:tcPr anchor="ctr" marL="73152" marR="73152" marT="27432" marB="27432">
+                    <a:solidFill>
+                      <a:srgbClr val="FFFFFF"/>
+                    </a:solidFill>
+                  </a:tcPr>
+                </a:tc>
+                <a:tc>
+                  <a:txBody>
+                    <a:bodyPr/>
+                    <a:lstStyle/>
+                    <a:p>
+                      <a:pPr algn="l"/>
+                      <a:r>
+                        <a:rPr sz="1100" b="0">
+                          <a:solidFill>
+                            <a:srgbClr val="0B213F"/>
+                          </a:solidFill>
+                        </a:rPr>
+                        <a:t>High Availability</a:t>
+                      </a:r>
+                    </a:p>
+                  </a:txBody>
+                  <a:tcPr anchor="ctr" marL="73152" marR="73152" marT="27432" marB="27432">
+                    <a:solidFill>
+                      <a:srgbClr val="FFFFFF"/>
+                    </a:solidFill>
+                  </a:tcPr>
+                </a:tc>
+              </a:tr>
+              <a:tr h="438912">
+                <a:tc>
+                  <a:txBody>
+                    <a:bodyPr/>
+                    <a:lstStyle/>
+                    <a:p>
+                      <a:pPr algn="l"/>
+                      <a:r>
+                        <a:rPr sz="1100" b="1">
+                          <a:solidFill>
+                            <a:srgbClr val="0E7C86"/>
+                          </a:solidFill>
+                        </a:rPr>
+                        <a:t>HTTPS</a:t>
+                      </a:r>
+                    </a:p>
+                  </a:txBody>
+                  <a:tcPr anchor="ctr" marL="73152" marR="73152" marT="27432" marB="27432">
+                    <a:solidFill>
+                      <a:srgbClr val="F4F6F8"/>
+                    </a:solidFill>
+                  </a:tcPr>
+                </a:tc>
+                <a:tc>
+                  <a:txBody>
+                    <a:bodyPr/>
+                    <a:lstStyle/>
+                    <a:p>
+                      <a:pPr algn="l"/>
+                      <a:r>
+                        <a:rPr sz="1100" b="0">
+                          <a:solidFill>
+                            <a:srgbClr val="0B213F"/>
+                          </a:solidFill>
+                        </a:rPr>
+                        <a:t>Hypertext Transfer Protocol Secure</a:t>
+                      </a:r>
+                    </a:p>
+                  </a:txBody>
+                  <a:tcPr anchor="ctr" marL="73152" marR="73152" marT="27432" marB="27432">
+                    <a:solidFill>
+                      <a:srgbClr val="F4F6F8"/>
+                    </a:solidFill>
+                  </a:tcPr>
+                </a:tc>
+              </a:tr>
+              <a:tr h="438912">
+                <a:tc>
+                  <a:txBody>
+                    <a:bodyPr/>
+                    <a:lstStyle/>
+                    <a:p>
+                      <a:pPr algn="l"/>
+                      <a:r>
+                        <a:rPr sz="1100" b="1">
+                          <a:solidFill>
+                            <a:srgbClr val="0E7C86"/>
+                          </a:solidFill>
+                        </a:rPr>
+                        <a:t>MCP</a:t>
+                      </a:r>
+                    </a:p>
+                  </a:txBody>
+                  <a:tcPr anchor="ctr" marL="73152" marR="73152" marT="27432" marB="27432">
+                    <a:solidFill>
+                      <a:srgbClr val="FFFFFF"/>
+                    </a:solidFill>
+                  </a:tcPr>
+                </a:tc>
+                <a:tc>
+                  <a:txBody>
+                    <a:bodyPr/>
+                    <a:lstStyle/>
+                    <a:p>
+                      <a:pPr algn="l"/>
+                      <a:r>
+                        <a:rPr sz="1100" b="0">
+                          <a:solidFill>
+                            <a:srgbClr val="0B213F"/>
+                          </a:solidFill>
+                        </a:rPr>
+                        <a:t>Model Context Protocol</a:t>
+                      </a:r>
+                    </a:p>
+                  </a:txBody>
+                  <a:tcPr anchor="ctr" marL="73152" marR="73152" marT="27432" marB="27432">
+                    <a:solidFill>
+                      <a:srgbClr val="FFFFFF"/>
+                    </a:solidFill>
+                  </a:tcPr>
+                </a:tc>
+              </a:tr>
+              <a:tr h="438912">
+                <a:tc>
+                  <a:txBody>
+                    <a:bodyPr/>
+                    <a:lstStyle/>
+                    <a:p>
+                      <a:pPr algn="l"/>
+                      <a:r>
+                        <a:rPr sz="1100" b="1">
+                          <a:solidFill>
+                            <a:srgbClr val="0E7C86"/>
+                          </a:solidFill>
+                        </a:rPr>
+                        <a:t>OIDC</a:t>
+                      </a:r>
+                    </a:p>
+                  </a:txBody>
+                  <a:tcPr anchor="ctr" marL="73152" marR="73152" marT="27432" marB="27432">
+                    <a:solidFill>
+                      <a:srgbClr val="F4F6F8"/>
+                    </a:solidFill>
+                  </a:tcPr>
+                </a:tc>
+                <a:tc>
+                  <a:txBody>
+                    <a:bodyPr/>
+                    <a:lstStyle/>
+                    <a:p>
+                      <a:pPr algn="l"/>
+                      <a:r>
+                        <a:rPr sz="1100" b="0">
+                          <a:solidFill>
+                            <a:srgbClr val="0B213F"/>
+                          </a:solidFill>
+                        </a:rPr>
+                        <a:t>OpenID Connect</a:t>
+                      </a:r>
+                    </a:p>
+                  </a:txBody>
+                  <a:tcPr anchor="ctr" marL="73152" marR="73152" marT="27432" marB="27432">
+                    <a:solidFill>
+                      <a:srgbClr val="F4F6F8"/>
+                    </a:solidFill>
+                  </a:tcPr>
+                </a:tc>
+              </a:tr>
+            </a:tbl>
+          </a:graphicData>
+        </a:graphic>
+      </p:graphicFrame>
+      <p:graphicFrame>
+        <p:nvGraphicFramePr>
+          <p:cNvPr id="7" name="Table 6"/>
+          <p:cNvGraphicFramePr>
+            <a:graphicFrameLocks noGrp="1"/>
+          </p:cNvGraphicFramePr>
+          <p:nvPr/>
+        </p:nvGraphicFramePr>
+        <p:xfrm>
+          <a:off x="6217920" y="1417320"/>
+          <a:ext cx="5394960" cy="4389120"/>
+        </p:xfrm>
+        <a:graphic>
+          <a:graphicData uri="http://schemas.openxmlformats.org/drawingml/2006/table">
+            <a:tbl>
+              <a:tblPr firstRow="1" bandRow="1">
+                <a:tableStyleId>{5C22544A-7EE6-4342-B048-85BDC9FD1C3A}</a:tableStyleId>
+              </a:tblPr>
+              <a:tblGrid>
+                <a:gridCol w="1463040"/>
+                <a:gridCol w="3931920"/>
+              </a:tblGrid>
+              <a:tr h="438912">
+                <a:tc>
+                  <a:txBody>
+                    <a:bodyPr/>
+                    <a:lstStyle/>
+                    <a:p>
+                      <a:pPr algn="l"/>
+                      <a:r>
+                        <a:rPr sz="1200" b="1">
+                          <a:solidFill>
+                            <a:srgbClr val="FFFFFF"/>
+                          </a:solidFill>
+                        </a:rPr>
+                        <a:t>Abbrev.</a:t>
+                      </a:r>
+                    </a:p>
+                  </a:txBody>
+                  <a:tcPr anchor="ctr" marL="73152" marR="73152" marT="27432" marB="27432">
+                    <a:solidFill>
+                      <a:srgbClr val="0B213F"/>
+                    </a:solidFill>
+                  </a:tcPr>
+                </a:tc>
+                <a:tc>
+                  <a:txBody>
+                    <a:bodyPr/>
+                    <a:lstStyle/>
+                    <a:p>
+                      <a:pPr algn="l"/>
+                      <a:r>
+                        <a:rPr sz="1200" b="1">
+                          <a:solidFill>
+                            <a:srgbClr val="FFFFFF"/>
+                          </a:solidFill>
+                        </a:rPr>
+                        <a:t>Expansion</a:t>
+                      </a:r>
+                    </a:p>
+                  </a:txBody>
+                  <a:tcPr anchor="ctr" marL="73152" marR="73152" marT="27432" marB="27432">
+                    <a:solidFill>
+                      <a:srgbClr val="0B213F"/>
+                    </a:solidFill>
+                  </a:tcPr>
+                </a:tc>
+              </a:tr>
+              <a:tr h="438912">
+                <a:tc>
+                  <a:txBody>
+                    <a:bodyPr/>
+                    <a:lstStyle/>
+                    <a:p>
+                      <a:pPr algn="l"/>
+                      <a:r>
+                        <a:rPr sz="1100" b="1">
+                          <a:solidFill>
+                            <a:srgbClr val="0E7C86"/>
+                          </a:solidFill>
+                        </a:rPr>
+                        <a:t>PKCE</a:t>
+                      </a:r>
+                    </a:p>
+                  </a:txBody>
+                  <a:tcPr anchor="ctr" marL="73152" marR="73152" marT="27432" marB="27432">
+                    <a:solidFill>
+                      <a:srgbClr val="FFFFFF"/>
+                    </a:solidFill>
+                  </a:tcPr>
+                </a:tc>
+                <a:tc>
+                  <a:txBody>
+                    <a:bodyPr/>
+                    <a:lstStyle/>
+                    <a:p>
+                      <a:pPr algn="l"/>
+                      <a:r>
+                        <a:rPr sz="1100" b="0">
+                          <a:solidFill>
+                            <a:srgbClr val="0B213F"/>
+                          </a:solidFill>
+                        </a:rPr>
+                        <a:t>Proof Key for Code Exchange</a:t>
+                      </a:r>
+                    </a:p>
+                  </a:txBody>
+                  <a:tcPr anchor="ctr" marL="73152" marR="73152" marT="27432" marB="27432">
+                    <a:solidFill>
+                      <a:srgbClr val="FFFFFF"/>
+                    </a:solidFill>
+                  </a:tcPr>
+                </a:tc>
+              </a:tr>
+              <a:tr h="438912">
+                <a:tc>
+                  <a:txBody>
+                    <a:bodyPr/>
+                    <a:lstStyle/>
+                    <a:p>
+                      <a:pPr algn="l"/>
+                      <a:r>
+                        <a:rPr sz="1100" b="1">
+                          <a:solidFill>
+                            <a:srgbClr val="0E7C86"/>
+                          </a:solidFill>
+                        </a:rPr>
+                        <a:t>RLS</a:t>
+                      </a:r>
+                    </a:p>
+                  </a:txBody>
+                  <a:tcPr anchor="ctr" marL="73152" marR="73152" marT="27432" marB="27432">
+                    <a:solidFill>
+                      <a:srgbClr val="F4F6F8"/>
+                    </a:solidFill>
+                  </a:tcPr>
+                </a:tc>
+                <a:tc>
+                  <a:txBody>
+                    <a:bodyPr/>
+                    <a:lstStyle/>
+                    <a:p>
+                      <a:pPr algn="l"/>
+                      <a:r>
+                        <a:rPr sz="1100" b="0">
+                          <a:solidFill>
+                            <a:srgbClr val="0B213F"/>
+                          </a:solidFill>
+                        </a:rPr>
+                        <a:t>Row-Level Security</a:t>
+                      </a:r>
+                    </a:p>
+                  </a:txBody>
+                  <a:tcPr anchor="ctr" marL="73152" marR="73152" marT="27432" marB="27432">
+                    <a:solidFill>
+                      <a:srgbClr val="F4F6F8"/>
+                    </a:solidFill>
+                  </a:tcPr>
+                </a:tc>
+              </a:tr>
+              <a:tr h="438912">
+                <a:tc>
+                  <a:txBody>
+                    <a:bodyPr/>
+                    <a:lstStyle/>
+                    <a:p>
+                      <a:pPr algn="l"/>
+                      <a:r>
+                        <a:rPr sz="1100" b="1">
+                          <a:solidFill>
+                            <a:srgbClr val="0E7C86"/>
+                          </a:solidFill>
+                        </a:rPr>
+                        <a:t>RPO</a:t>
+                      </a:r>
+                    </a:p>
+                  </a:txBody>
+                  <a:tcPr anchor="ctr" marL="73152" marR="73152" marT="27432" marB="27432">
+                    <a:solidFill>
+                      <a:srgbClr val="FFFFFF"/>
+                    </a:solidFill>
+                  </a:tcPr>
+                </a:tc>
+                <a:tc>
+                  <a:txBody>
+                    <a:bodyPr/>
+                    <a:lstStyle/>
+                    <a:p>
+                      <a:pPr algn="l"/>
+                      <a:r>
+                        <a:rPr sz="1100" b="0">
+                          <a:solidFill>
+                            <a:srgbClr val="0B213F"/>
+                          </a:solidFill>
+                        </a:rPr>
+                        <a:t>Recovery Point Objective</a:t>
+                      </a:r>
+                    </a:p>
+                  </a:txBody>
+                  <a:tcPr anchor="ctr" marL="73152" marR="73152" marT="27432" marB="27432">
+                    <a:solidFill>
+                      <a:srgbClr val="FFFFFF"/>
+                    </a:solidFill>
+                  </a:tcPr>
+                </a:tc>
+              </a:tr>
+              <a:tr h="438912">
+                <a:tc>
+                  <a:txBody>
+                    <a:bodyPr/>
+                    <a:lstStyle/>
+                    <a:p>
+                      <a:pPr algn="l"/>
+                      <a:r>
+                        <a:rPr sz="1100" b="1">
+                          <a:solidFill>
+                            <a:srgbClr val="0E7C86"/>
+                          </a:solidFill>
+                        </a:rPr>
+                        <a:t>RTO</a:t>
+                      </a:r>
+                    </a:p>
+                  </a:txBody>
+                  <a:tcPr anchor="ctr" marL="73152" marR="73152" marT="27432" marB="27432">
+                    <a:solidFill>
+                      <a:srgbClr val="F4F6F8"/>
+                    </a:solidFill>
+                  </a:tcPr>
+                </a:tc>
+                <a:tc>
+                  <a:txBody>
+                    <a:bodyPr/>
+                    <a:lstStyle/>
+                    <a:p>
+                      <a:pPr algn="l"/>
+                      <a:r>
+                        <a:rPr sz="1100" b="0">
+                          <a:solidFill>
+                            <a:srgbClr val="0B213F"/>
+                          </a:solidFill>
+                        </a:rPr>
+                        <a:t>Recovery Time Objective</a:t>
+                      </a:r>
+                    </a:p>
+                  </a:txBody>
+                  <a:tcPr anchor="ctr" marL="73152" marR="73152" marT="27432" marB="27432">
+                    <a:solidFill>
+                      <a:srgbClr val="F4F6F8"/>
+                    </a:solidFill>
+                  </a:tcPr>
+                </a:tc>
+              </a:tr>
+              <a:tr h="438912">
+                <a:tc>
+                  <a:txBody>
+                    <a:bodyPr/>
+                    <a:lstStyle/>
+                    <a:p>
+                      <a:pPr algn="l"/>
+                      <a:r>
+                        <a:rPr sz="1100" b="1">
+                          <a:solidFill>
+                            <a:srgbClr val="0E7C86"/>
+                          </a:solidFill>
+                        </a:rPr>
+                        <a:t>SKU</a:t>
+                      </a:r>
+                    </a:p>
+                  </a:txBody>
+                  <a:tcPr anchor="ctr" marL="73152" marR="73152" marT="27432" marB="27432">
+                    <a:solidFill>
+                      <a:srgbClr val="FFFFFF"/>
+                    </a:solidFill>
+                  </a:tcPr>
+                </a:tc>
+                <a:tc>
+                  <a:txBody>
+                    <a:bodyPr/>
+                    <a:lstStyle/>
+                    <a:p>
+                      <a:pPr algn="l"/>
+                      <a:r>
+                        <a:rPr sz="1100" b="0">
+                          <a:solidFill>
+                            <a:srgbClr val="0B213F"/>
+                          </a:solidFill>
+                        </a:rPr>
+                        <a:t>Stock Keeping Unit (cloud pricing/capacity tier)</a:t>
+                      </a:r>
+                    </a:p>
+                  </a:txBody>
+                  <a:tcPr anchor="ctr" marL="73152" marR="73152" marT="27432" marB="27432">
+                    <a:solidFill>
+                      <a:srgbClr val="FFFFFF"/>
+                    </a:solidFill>
+                  </a:tcPr>
+                </a:tc>
+              </a:tr>
+              <a:tr h="438912">
+                <a:tc>
+                  <a:txBody>
+                    <a:bodyPr/>
+                    <a:lstStyle/>
+                    <a:p>
+                      <a:pPr algn="l"/>
+                      <a:r>
+                        <a:rPr sz="1100" b="1">
+                          <a:solidFill>
+                            <a:srgbClr val="0E7C86"/>
+                          </a:solidFill>
+                        </a:rPr>
+                        <a:t>SLO</a:t>
+                      </a:r>
+                    </a:p>
+                  </a:txBody>
+                  <a:tcPr anchor="ctr" marL="73152" marR="73152" marT="27432" marB="27432">
+                    <a:solidFill>
+                      <a:srgbClr val="F4F6F8"/>
+                    </a:solidFill>
+                  </a:tcPr>
+                </a:tc>
+                <a:tc>
+                  <a:txBody>
+                    <a:bodyPr/>
+                    <a:lstStyle/>
+                    <a:p>
+                      <a:pPr algn="l"/>
+                      <a:r>
+                        <a:rPr sz="1100" b="0">
+                          <a:solidFill>
+                            <a:srgbClr val="0B213F"/>
+                          </a:solidFill>
+                        </a:rPr>
+                        <a:t>Service Level Objective</a:t>
+                      </a:r>
+                    </a:p>
+                  </a:txBody>
+                  <a:tcPr anchor="ctr" marL="73152" marR="73152" marT="27432" marB="27432">
+                    <a:solidFill>
+                      <a:srgbClr val="F4F6F8"/>
+                    </a:solidFill>
+                  </a:tcPr>
+                </a:tc>
+              </a:tr>
+              <a:tr h="438912">
+                <a:tc>
+                  <a:txBody>
+                    <a:bodyPr/>
+                    <a:lstStyle/>
+                    <a:p>
+                      <a:pPr algn="l"/>
+                      <a:r>
+                        <a:rPr sz="1100" b="1">
+                          <a:solidFill>
+                            <a:srgbClr val="0E7C86"/>
+                          </a:solidFill>
+                        </a:rPr>
+                        <a:t>SQL</a:t>
+                      </a:r>
+                    </a:p>
+                  </a:txBody>
+                  <a:tcPr anchor="ctr" marL="73152" marR="73152" marT="27432" marB="27432">
+                    <a:solidFill>
+                      <a:srgbClr val="FFFFFF"/>
+                    </a:solidFill>
+                  </a:tcPr>
+                </a:tc>
+                <a:tc>
+                  <a:txBody>
+                    <a:bodyPr/>
+                    <a:lstStyle/>
+                    <a:p>
+                      <a:pPr algn="l"/>
+                      <a:r>
+                        <a:rPr sz="1100" b="0">
+                          <a:solidFill>
+                            <a:srgbClr val="0B213F"/>
+                          </a:solidFill>
+                        </a:rPr>
+                        <a:t>Structured Query Language</a:t>
+                      </a:r>
+                    </a:p>
+                  </a:txBody>
+                  <a:tcPr anchor="ctr" marL="73152" marR="73152" marT="27432" marB="27432">
+                    <a:solidFill>
+                      <a:srgbClr val="FFFFFF"/>
+                    </a:solidFill>
+                  </a:tcPr>
+                </a:tc>
+              </a:tr>
+              <a:tr h="438912">
+                <a:tc>
+                  <a:txBody>
+                    <a:bodyPr/>
+                    <a:lstStyle/>
+                    <a:p>
+                      <a:pPr algn="l"/>
+                      <a:r>
+                        <a:rPr sz="1100" b="1">
+                          <a:solidFill>
+                            <a:srgbClr val="0E7C86"/>
+                          </a:solidFill>
+                        </a:rPr>
+                        <a:t>VNet</a:t>
+                      </a:r>
+                    </a:p>
+                  </a:txBody>
+                  <a:tcPr anchor="ctr" marL="73152" marR="73152" marT="27432" marB="27432">
+                    <a:solidFill>
+                      <a:srgbClr val="F4F6F8"/>
+                    </a:solidFill>
+                  </a:tcPr>
+                </a:tc>
+                <a:tc>
+                  <a:txBody>
+                    <a:bodyPr/>
+                    <a:lstStyle/>
+                    <a:p>
+                      <a:pPr algn="l"/>
+                      <a:r>
+                        <a:rPr sz="1100" b="0">
+                          <a:solidFill>
+                            <a:srgbClr val="0B213F"/>
+                          </a:solidFill>
+                        </a:rPr>
+                        <a:t>Virtual Network</a:t>
+                      </a:r>
+                    </a:p>
+                  </a:txBody>
+                  <a:tcPr anchor="ctr" marL="73152" marR="73152" marT="27432" marB="27432">
+                    <a:solidFill>
+                      <a:srgbClr val="F4F6F8"/>
+                    </a:solidFill>
+                  </a:tcPr>
+                </a:tc>
+              </a:tr>
+              <a:tr h="438912">
+                <a:tc>
+                  <a:txBody>
+                    <a:bodyPr/>
+                    <a:lstStyle/>
+                    <a:p>
+                      <a:pPr algn="l"/>
+                      <a:r>
+                        <a:rPr sz="1100" b="1">
+                          <a:solidFill>
+                            <a:srgbClr val="0E7C86"/>
+                          </a:solidFill>
+                        </a:rPr>
+                        <a:t>WAF</a:t>
+                      </a:r>
+                    </a:p>
+                  </a:txBody>
+                  <a:tcPr anchor="ctr" marL="73152" marR="73152" marT="27432" marB="27432">
+                    <a:solidFill>
+                      <a:srgbClr val="FFFFFF"/>
+                    </a:solidFill>
+                  </a:tcPr>
+                </a:tc>
+                <a:tc>
+                  <a:txBody>
+                    <a:bodyPr/>
+                    <a:lstStyle/>
+                    <a:p>
+                      <a:pPr algn="l"/>
+                      <a:r>
+                        <a:rPr sz="1100" b="0">
+                          <a:solidFill>
+                            <a:srgbClr val="0B213F"/>
+                          </a:solidFill>
+                        </a:rPr>
+                        <a:t>Web Application Firewall</a:t>
+                      </a:r>
+                    </a:p>
+                  </a:txBody>
+                  <a:tcPr anchor="ctr" marL="73152" marR="73152" marT="27432" marB="27432">
+                    <a:solidFill>
+                      <a:srgbClr val="FFFFFF"/>
+                    </a:solidFill>
+                  </a:tcPr>
+                </a:tc>
+              </a:tr>
+            </a:tbl>
+          </a:graphicData>
+        </a:graphic>
+      </p:graphicFrame>
+      <p:sp>
+        <p:nvSpPr>
+          <p:cNvPr id="8" name="TextBox 7"/>
+          <p:cNvSpPr txBox="1"/>
+          <p:nvPr/>
+        </p:nvSpPr>
+        <p:spPr>
+          <a:xfrm>
+            <a:off x="548640" y="6446520"/>
+            <a:ext cx="5486400" cy="274320"/>
+          </a:xfrm>
+          <a:prstGeom prst="rect">
+            <a:avLst/>
+          </a:prstGeom>
+          <a:noFill/>
+        </p:spPr>
+        <p:txBody>
+          <a:bodyPr wrap="square">
+            <a:spAutoFit/>
+          </a:bodyPr>
+          <a:lstStyle/>
+          <a:p>
+            <a:pPr algn="l"/>
+            <a:r>
+              <a:rPr sz="900" b="0" i="0">
+                <a:solidFill>
+                  <a:srgbClr val="555F6B"/>
+                </a:solidFill>
+                <a:latin typeface="Calibri"/>
+              </a:rPr>
+              <a:t>KEYFORTA — Architecture Overview · Confidential</a:t>
+            </a:r>
+          </a:p>
+        </p:txBody>
+      </p:sp>
+      <p:sp>
+        <p:nvSpPr>
+          <p:cNvPr id="9" name="TextBox 8"/>
+          <p:cNvSpPr txBox="1"/>
+          <p:nvPr/>
+        </p:nvSpPr>
+        <p:spPr>
+          <a:xfrm>
+            <a:off x="10911535" y="6446520"/>
+            <a:ext cx="822960" cy="274320"/>
+          </a:xfrm>
+          <a:prstGeom prst="rect">
+            <a:avLst/>
+          </a:prstGeom>
+          <a:noFill/>
+        </p:spPr>
+        <p:txBody>
+          <a:bodyPr wrap="square">
+            <a:spAutoFit/>
+          </a:bodyPr>
+          <a:lstStyle/>
+          <a:p>
+            <a:pPr algn="r"/>
+            <a:r>
+              <a:rPr sz="900" b="0" i="0">
+                <a:solidFill>
+                  <a:srgbClr val="555F6B"/>
+                </a:solidFill>
+                <a:latin typeface="Calibri"/>
+              </a:rPr>
+              <a:t>13</a:t>
+            </a:r>
+          </a:p>
+        </p:txBody>
+      </p:sp>
+    </p:spTree>
+  </p:cSld>
+  <p:clrMapOvr>
+    <a:masterClrMapping/>
+  </p:clrMapOvr>
+</p:sld>
+</file>
+
+<file path=ppt/slides/slide14.xml><?xml version="1.0" encoding="utf-8"?>
+<p:sld xmlns:a="http://schemas.openxmlformats.org/drawingml/2006/main" xmlns:p="http://schemas.openxmlformats.org/presentationml/2006/main" xmlns:r="http://schemas.openxmlformats.org/officeDocument/2006/relationships">
+  <p:cSld>
+    <p:bg>
+      <p:bgPr>
+        <a:solidFill>
           <a:srgbClr val="0B213F"/>
         </a:solidFill>
         <a:effectLst/>
@@ -4116,13 +6825,13 @@
           <a:p>
             <a:pPr algn="l"/>
             <a:r>
-              <a:rPr sz="1500" b="0" i="0">
+              <a:rPr sz="1800" b="0" i="0">
                 <a:solidFill>
                   <a:srgbClr val="C99A2E"/>
                 </a:solidFill>
                 <a:latin typeface="Calibri"/>
               </a:rPr>
-              <a:t>docs/adr · docs/architecture/adr · docs/contracts — full authoritative detail</a:t>
+              <a:t>Thank you</a:t>
             </a:r>
           </a:p>
         </p:txBody>
@@ -4335,7 +7044,7 @@
           <a:p>
             <a:pPr algn="l"/>
             <a:r>
-              <a:rPr sz="2800" b="1" i="0">
+              <a:rPr sz="2600" b="1" i="0">
                 <a:solidFill>
                   <a:srgbClr val="0B213F"/>
                 </a:solidFill>
@@ -4398,8 +7107,8 @@
         </p:nvSpPr>
         <p:spPr>
           <a:xfrm>
-            <a:off x="731520" y="1554480"/>
-            <a:ext cx="457200" cy="457200"/>
+            <a:off x="731520" y="1463040"/>
+            <a:ext cx="420624" cy="420624"/>
           </a:xfrm>
           <a:prstGeom prst="roundRect">
             <a:avLst>
@@ -4446,8 +7155,8 @@
         </p:nvSpPr>
         <p:spPr>
           <a:xfrm>
-            <a:off x="731520" y="1554480"/>
-            <a:ext cx="457200" cy="457200"/>
+            <a:off x="731520" y="1463040"/>
+            <a:ext cx="420624" cy="420624"/>
           </a:xfrm>
           <a:prstGeom prst="rect">
             <a:avLst/>
@@ -4462,7 +7171,7 @@
           <a:p>
             <a:pPr algn="ctr"/>
             <a:r>
-              <a:rPr sz="1800" b="1" i="0">
+              <a:rPr sz="1600" b="1" i="0">
                 <a:solidFill>
                   <a:srgbClr val="FFFFFF"/>
                 </a:solidFill>
@@ -4481,8 +7190,8 @@
         </p:nvSpPr>
         <p:spPr>
           <a:xfrm>
-            <a:off x="1371600" y="1581912"/>
-            <a:ext cx="9601200" cy="457200"/>
+            <a:off x="1325880" y="1481328"/>
+            <a:ext cx="9784080" cy="420624"/>
           </a:xfrm>
           <a:prstGeom prst="rect">
             <a:avLst/>
@@ -4497,7 +7206,7 @@
           <a:p>
             <a:pPr algn="l"/>
             <a:r>
-              <a:rPr sz="1600" b="0" i="0">
+              <a:rPr sz="1500" b="0" i="0">
                 <a:solidFill>
                   <a:srgbClr val="0B213F"/>
                 </a:solidFill>
@@ -4516,8 +7225,8 @@
         </p:nvSpPr>
         <p:spPr>
           <a:xfrm>
-            <a:off x="731520" y="2121408"/>
-            <a:ext cx="457200" cy="457200"/>
+            <a:off x="731520" y="1979675"/>
+            <a:ext cx="420624" cy="420624"/>
           </a:xfrm>
           <a:prstGeom prst="roundRect">
             <a:avLst>
@@ -4564,8 +7273,8 @@
         </p:nvSpPr>
         <p:spPr>
           <a:xfrm>
-            <a:off x="731520" y="2121408"/>
-            <a:ext cx="457200" cy="457200"/>
+            <a:off x="731520" y="1979675"/>
+            <a:ext cx="420624" cy="420624"/>
           </a:xfrm>
           <a:prstGeom prst="rect">
             <a:avLst/>
@@ -4580,7 +7289,7 @@
           <a:p>
             <a:pPr algn="ctr"/>
             <a:r>
-              <a:rPr sz="1800" b="1" i="0">
+              <a:rPr sz="1600" b="1" i="0">
                 <a:solidFill>
                   <a:srgbClr val="FFFFFF"/>
                 </a:solidFill>
@@ -4599,8 +7308,8 @@
         </p:nvSpPr>
         <p:spPr>
           <a:xfrm>
-            <a:off x="1371600" y="2148840"/>
-            <a:ext cx="9601200" cy="457200"/>
+            <a:off x="1325880" y="1997963"/>
+            <a:ext cx="9784080" cy="420624"/>
           </a:xfrm>
           <a:prstGeom prst="rect">
             <a:avLst/>
@@ -4615,7 +7324,7 @@
           <a:p>
             <a:pPr algn="l"/>
             <a:r>
-              <a:rPr sz="1600" b="0" i="0">
+              <a:rPr sz="1500" b="0" i="0">
                 <a:solidFill>
                   <a:srgbClr val="0B213F"/>
                 </a:solidFill>
@@ -4634,8 +7343,8 @@
         </p:nvSpPr>
         <p:spPr>
           <a:xfrm>
-            <a:off x="731520" y="2688336"/>
-            <a:ext cx="457200" cy="457200"/>
+            <a:off x="731520" y="2496310"/>
+            <a:ext cx="420624" cy="420624"/>
           </a:xfrm>
           <a:prstGeom prst="roundRect">
             <a:avLst>
@@ -4682,8 +7391,8 @@
         </p:nvSpPr>
         <p:spPr>
           <a:xfrm>
-            <a:off x="731520" y="2688336"/>
-            <a:ext cx="457200" cy="457200"/>
+            <a:off x="731520" y="2496310"/>
+            <a:ext cx="420624" cy="420624"/>
           </a:xfrm>
           <a:prstGeom prst="rect">
             <a:avLst/>
@@ -4698,7 +7407,7 @@
           <a:p>
             <a:pPr algn="ctr"/>
             <a:r>
-              <a:rPr sz="1800" b="1" i="0">
+              <a:rPr sz="1600" b="1" i="0">
                 <a:solidFill>
                   <a:srgbClr val="FFFFFF"/>
                 </a:solidFill>
@@ -4717,8 +7426,8 @@
         </p:nvSpPr>
         <p:spPr>
           <a:xfrm>
-            <a:off x="1371600" y="2715768"/>
-            <a:ext cx="9601200" cy="457200"/>
+            <a:off x="1325880" y="2514598"/>
+            <a:ext cx="9784080" cy="420624"/>
           </a:xfrm>
           <a:prstGeom prst="rect">
             <a:avLst/>
@@ -4733,7 +7442,7 @@
           <a:p>
             <a:pPr algn="l"/>
             <a:r>
-              <a:rPr sz="1600" b="0" i="0">
+              <a:rPr sz="1500" b="0" i="0">
                 <a:solidFill>
                   <a:srgbClr val="0B213F"/>
                 </a:solidFill>
@@ -4752,8 +7461,8 @@
         </p:nvSpPr>
         <p:spPr>
           <a:xfrm>
-            <a:off x="731520" y="3255264"/>
-            <a:ext cx="457200" cy="457200"/>
+            <a:off x="731520" y="3012945"/>
+            <a:ext cx="420624" cy="420624"/>
           </a:xfrm>
           <a:prstGeom prst="roundRect">
             <a:avLst>
@@ -4800,8 +7509,8 @@
         </p:nvSpPr>
         <p:spPr>
           <a:xfrm>
-            <a:off x="731520" y="3255264"/>
-            <a:ext cx="457200" cy="457200"/>
+            <a:off x="731520" y="3012945"/>
+            <a:ext cx="420624" cy="420624"/>
           </a:xfrm>
           <a:prstGeom prst="rect">
             <a:avLst/>
@@ -4816,7 +7525,7 @@
           <a:p>
             <a:pPr algn="ctr"/>
             <a:r>
-              <a:rPr sz="1800" b="1" i="0">
+              <a:rPr sz="1600" b="1" i="0">
                 <a:solidFill>
                   <a:srgbClr val="FFFFFF"/>
                 </a:solidFill>
@@ -4835,8 +7544,8 @@
         </p:nvSpPr>
         <p:spPr>
           <a:xfrm>
-            <a:off x="1371600" y="3282696"/>
-            <a:ext cx="9601200" cy="457200"/>
+            <a:off x="1325880" y="3031233"/>
+            <a:ext cx="9784080" cy="420624"/>
           </a:xfrm>
           <a:prstGeom prst="rect">
             <a:avLst/>
@@ -4851,7 +7560,7 @@
           <a:p>
             <a:pPr algn="l"/>
             <a:r>
-              <a:rPr sz="1600" b="0" i="0">
+              <a:rPr sz="1500" b="0" i="0">
                 <a:solidFill>
                   <a:srgbClr val="0B213F"/>
                 </a:solidFill>
@@ -4870,8 +7579,8 @@
         </p:nvSpPr>
         <p:spPr>
           <a:xfrm>
-            <a:off x="731520" y="3822192"/>
-            <a:ext cx="457200" cy="457200"/>
+            <a:off x="731520" y="3529580"/>
+            <a:ext cx="420624" cy="420624"/>
           </a:xfrm>
           <a:prstGeom prst="roundRect">
             <a:avLst>
@@ -4918,8 +7627,8 @@
         </p:nvSpPr>
         <p:spPr>
           <a:xfrm>
-            <a:off x="731520" y="3822192"/>
-            <a:ext cx="457200" cy="457200"/>
+            <a:off x="731520" y="3529580"/>
+            <a:ext cx="420624" cy="420624"/>
           </a:xfrm>
           <a:prstGeom prst="rect">
             <a:avLst/>
@@ -4934,7 +7643,7 @@
           <a:p>
             <a:pPr algn="ctr"/>
             <a:r>
-              <a:rPr sz="1800" b="1" i="0">
+              <a:rPr sz="1600" b="1" i="0">
                 <a:solidFill>
                   <a:srgbClr val="FFFFFF"/>
                 </a:solidFill>
@@ -4953,8 +7662,8 @@
         </p:nvSpPr>
         <p:spPr>
           <a:xfrm>
-            <a:off x="1371600" y="3849624"/>
-            <a:ext cx="9601200" cy="457200"/>
+            <a:off x="1325880" y="3547868"/>
+            <a:ext cx="9784080" cy="420624"/>
           </a:xfrm>
           <a:prstGeom prst="rect">
             <a:avLst/>
@@ -4969,7 +7678,7 @@
           <a:p>
             <a:pPr algn="l"/>
             <a:r>
-              <a:rPr sz="1600" b="0" i="0">
+              <a:rPr sz="1500" b="0" i="0">
                 <a:solidFill>
                   <a:srgbClr val="0B213F"/>
                 </a:solidFill>
@@ -4988,8 +7697,8 @@
         </p:nvSpPr>
         <p:spPr>
           <a:xfrm>
-            <a:off x="731520" y="4389120"/>
-            <a:ext cx="457200" cy="457200"/>
+            <a:off x="731520" y="4046215"/>
+            <a:ext cx="420624" cy="420624"/>
           </a:xfrm>
           <a:prstGeom prst="roundRect">
             <a:avLst>
@@ -5036,8 +7745,8 @@
         </p:nvSpPr>
         <p:spPr>
           <a:xfrm>
-            <a:off x="731520" y="4389120"/>
-            <a:ext cx="457200" cy="457200"/>
+            <a:off x="731520" y="4046215"/>
+            <a:ext cx="420624" cy="420624"/>
           </a:xfrm>
           <a:prstGeom prst="rect">
             <a:avLst/>
@@ -5052,7 +7761,7 @@
           <a:p>
             <a:pPr algn="ctr"/>
             <a:r>
-              <a:rPr sz="1800" b="1" i="0">
+              <a:rPr sz="1600" b="1" i="0">
                 <a:solidFill>
                   <a:srgbClr val="FFFFFF"/>
                 </a:solidFill>
@@ -5071,8 +7780,8 @@
         </p:nvSpPr>
         <p:spPr>
           <a:xfrm>
-            <a:off x="1371600" y="4416552"/>
-            <a:ext cx="9601200" cy="457200"/>
+            <a:off x="1325880" y="4064503"/>
+            <a:ext cx="9784080" cy="420624"/>
           </a:xfrm>
           <a:prstGeom prst="rect">
             <a:avLst/>
@@ -5087,7 +7796,7 @@
           <a:p>
             <a:pPr algn="l"/>
             <a:r>
-              <a:rPr sz="1600" b="0" i="0">
+              <a:rPr sz="1500" b="0" i="0">
                 <a:solidFill>
                   <a:srgbClr val="0B213F"/>
                 </a:solidFill>
@@ -5106,8 +7815,8 @@
         </p:nvSpPr>
         <p:spPr>
           <a:xfrm>
-            <a:off x="731520" y="4956048"/>
-            <a:ext cx="457200" cy="457200"/>
+            <a:off x="731520" y="4562850"/>
+            <a:ext cx="420624" cy="420624"/>
           </a:xfrm>
           <a:prstGeom prst="roundRect">
             <a:avLst>
@@ -5154,8 +7863,8 @@
         </p:nvSpPr>
         <p:spPr>
           <a:xfrm>
-            <a:off x="731520" y="4956048"/>
-            <a:ext cx="457200" cy="457200"/>
+            <a:off x="731520" y="4562850"/>
+            <a:ext cx="420624" cy="420624"/>
           </a:xfrm>
           <a:prstGeom prst="rect">
             <a:avLst/>
@@ -5170,7 +7879,7 @@
           <a:p>
             <a:pPr algn="ctr"/>
             <a:r>
-              <a:rPr sz="1800" b="1" i="0">
+              <a:rPr sz="1600" b="1" i="0">
                 <a:solidFill>
                   <a:srgbClr val="FFFFFF"/>
                 </a:solidFill>
@@ -5189,8 +7898,8 @@
         </p:nvSpPr>
         <p:spPr>
           <a:xfrm>
-            <a:off x="1371600" y="4983480"/>
-            <a:ext cx="9601200" cy="457200"/>
+            <a:off x="1325880" y="4581138"/>
+            <a:ext cx="9784080" cy="420624"/>
           </a:xfrm>
           <a:prstGeom prst="rect">
             <a:avLst/>
@@ -5205,7 +7914,7 @@
           <a:p>
             <a:pPr algn="l"/>
             <a:r>
-              <a:rPr sz="1600" b="0" i="0">
+              <a:rPr sz="1500" b="0" i="0">
                 <a:solidFill>
                   <a:srgbClr val="0B213F"/>
                 </a:solidFill>
@@ -5224,8 +7933,8 @@
         </p:nvSpPr>
         <p:spPr>
           <a:xfrm>
-            <a:off x="731520" y="5522976"/>
-            <a:ext cx="457200" cy="457200"/>
+            <a:off x="731520" y="5079485"/>
+            <a:ext cx="420624" cy="420624"/>
           </a:xfrm>
           <a:prstGeom prst="roundRect">
             <a:avLst>
@@ -5272,8 +7981,8 @@
         </p:nvSpPr>
         <p:spPr>
           <a:xfrm>
-            <a:off x="731520" y="5522976"/>
-            <a:ext cx="457200" cy="457200"/>
+            <a:off x="731520" y="5079485"/>
+            <a:ext cx="420624" cy="420624"/>
           </a:xfrm>
           <a:prstGeom prst="rect">
             <a:avLst/>
@@ -5288,7 +7997,7 @@
           <a:p>
             <a:pPr algn="ctr"/>
             <a:r>
-              <a:rPr sz="1800" b="1" i="0">
+              <a:rPr sz="1600" b="1" i="0">
                 <a:solidFill>
                   <a:srgbClr val="FFFFFF"/>
                 </a:solidFill>
@@ -5307,8 +8016,8 @@
         </p:nvSpPr>
         <p:spPr>
           <a:xfrm>
-            <a:off x="1371600" y="5550408"/>
-            <a:ext cx="9601200" cy="457200"/>
+            <a:off x="1325880" y="5097773"/>
+            <a:ext cx="9784080" cy="420624"/>
           </a:xfrm>
           <a:prstGeom prst="rect">
             <a:avLst/>
@@ -5323,7 +8032,7 @@
           <a:p>
             <a:pPr algn="l"/>
             <a:r>
-              <a:rPr sz="1600" b="0" i="0">
+              <a:rPr sz="1500" b="0" i="0">
                 <a:solidFill>
                   <a:srgbClr val="0B213F"/>
                 </a:solidFill>
@@ -5336,7 +8045,125 @@
       </p:sp>
       <p:sp>
         <p:nvSpPr>
-          <p:cNvPr id="30" name="TextBox 29"/>
+          <p:cNvPr id="30" name="Rounded Rectangle 29"/>
+          <p:cNvSpPr/>
+          <p:nvPr/>
+        </p:nvSpPr>
+        <p:spPr>
+          <a:xfrm>
+            <a:off x="731520" y="5596120"/>
+            <a:ext cx="420624" cy="420624"/>
+          </a:xfrm>
+          <a:prstGeom prst="roundRect">
+            <a:avLst>
+              <a:gd name="adj" fmla="val 8000"/>
+            </a:avLst>
+          </a:prstGeom>
+          <a:solidFill>
+            <a:srgbClr val="0E7C86"/>
+          </a:solidFill>
+          <a:ln w="15875">
+            <a:solidFill>
+              <a:srgbClr val="0E7C86"/>
+            </a:solidFill>
+          </a:ln>
+          <a:effectLst/>
+        </p:spPr>
+        <p:style>
+          <a:lnRef idx="1">
+            <a:schemeClr val="accent1"/>
+          </a:lnRef>
+          <a:fillRef idx="3">
+            <a:schemeClr val="accent1"/>
+          </a:fillRef>
+          <a:effectRef idx="2">
+            <a:schemeClr val="accent1"/>
+          </a:effectRef>
+          <a:fontRef idx="minor">
+            <a:schemeClr val="lt1"/>
+          </a:fontRef>
+        </p:style>
+        <p:txBody>
+          <a:bodyPr rtlCol="0" anchor="ctr"/>
+          <a:lstStyle/>
+          <a:p>
+            <a:pPr algn="ctr"/>
+          </a:p>
+        </p:txBody>
+      </p:sp>
+      <p:sp>
+        <p:nvSpPr>
+          <p:cNvPr id="31" name="TextBox 30"/>
+          <p:cNvSpPr txBox="1"/>
+          <p:nvPr/>
+        </p:nvSpPr>
+        <p:spPr>
+          <a:xfrm>
+            <a:off x="731520" y="5596120"/>
+            <a:ext cx="420624" cy="420624"/>
+          </a:xfrm>
+          <a:prstGeom prst="rect">
+            <a:avLst/>
+          </a:prstGeom>
+          <a:noFill/>
+        </p:spPr>
+        <p:txBody>
+          <a:bodyPr wrap="square" anchor="ctr">
+            <a:spAutoFit/>
+          </a:bodyPr>
+          <a:lstStyle/>
+          <a:p>
+            <a:pPr algn="ctr"/>
+            <a:r>
+              <a:rPr sz="1600" b="1" i="0">
+                <a:solidFill>
+                  <a:srgbClr val="FFFFFF"/>
+                </a:solidFill>
+                <a:latin typeface="Calibri"/>
+              </a:rPr>
+              <a:t>9</a:t>
+            </a:r>
+          </a:p>
+        </p:txBody>
+      </p:sp>
+      <p:sp>
+        <p:nvSpPr>
+          <p:cNvPr id="32" name="TextBox 31"/>
+          <p:cNvSpPr txBox="1"/>
+          <p:nvPr/>
+        </p:nvSpPr>
+        <p:spPr>
+          <a:xfrm>
+            <a:off x="1325880" y="5614408"/>
+            <a:ext cx="9784080" cy="420624"/>
+          </a:xfrm>
+          <a:prstGeom prst="rect">
+            <a:avLst/>
+          </a:prstGeom>
+          <a:noFill/>
+        </p:spPr>
+        <p:txBody>
+          <a:bodyPr wrap="square" anchor="ctr">
+            <a:spAutoFit/>
+          </a:bodyPr>
+          <a:lstStyle/>
+          <a:p>
+            <a:pPr algn="l"/>
+            <a:r>
+              <a:rPr sz="1500" b="0" i="0">
+                <a:solidFill>
+                  <a:srgbClr val="0B213F"/>
+                </a:solidFill>
+                <a:latin typeface="Calibri"/>
+              </a:rPr>
+              <a:t>Glossary &amp; abbreviations</a:t>
+            </a:r>
+          </a:p>
+        </p:txBody>
+      </p:sp>
+      <p:sp>
+        <p:nvSpPr>
+          <p:cNvPr id="33" name="TextBox 32"/>
           <p:cNvSpPr txBox="1"/>
           <p:nvPr/>
         </p:nvSpPr>
@@ -5371,7 +8198,7 @@
       </p:sp>
       <p:sp>
         <p:nvSpPr>
-          <p:cNvPr id="31" name="TextBox 30"/>
+          <p:cNvPr id="34" name="TextBox 33"/>
           <p:cNvSpPr txBox="1"/>
           <p:nvPr/>
         </p:nvSpPr>
@@ -5504,7 +8331,7 @@
                 </a:solidFill>
                 <a:latin typeface="Calibri"/>
               </a:rPr>
-              <a:t>PRINCIPLES</a:t>
+              <a:t>SECTION 1</a:t>
             </a:r>
           </a:p>
         </p:txBody>
@@ -5533,13 +8360,13 @@
           <a:p>
             <a:pPr algn="l"/>
             <a:r>
-              <a:rPr sz="2800" b="1" i="0">
+              <a:rPr sz="2600" b="1" i="0">
                 <a:solidFill>
                   <a:srgbClr val="0B213F"/>
                 </a:solidFill>
                 <a:latin typeface="Calibri"/>
               </a:rPr>
-              <a:t>Product Invariants Drive the Architecture</a:t>
+              <a:t>Product &amp; Architecture Principles</a:t>
             </a:r>
           </a:p>
         </p:txBody>
@@ -5590,14 +8417,49 @@
       </p:sp>
       <p:sp>
         <p:nvSpPr>
-          <p:cNvPr id="6" name="Rounded Rectangle 5"/>
+          <p:cNvPr id="6" name="TextBox 5"/>
+          <p:cNvSpPr txBox="1"/>
+          <p:nvPr/>
+        </p:nvSpPr>
+        <p:spPr>
+          <a:xfrm>
+            <a:off x="548640" y="1298448"/>
+            <a:ext cx="10058400" cy="320040"/>
+          </a:xfrm>
+          <a:prstGeom prst="rect">
+            <a:avLst/>
+          </a:prstGeom>
+          <a:noFill/>
+        </p:spPr>
+        <p:txBody>
+          <a:bodyPr wrap="square">
+            <a:spAutoFit/>
+          </a:bodyPr>
+          <a:lstStyle/>
+          <a:p>
+            <a:pPr algn="l"/>
+            <a:r>
+              <a:rPr sz="1400" b="0" i="1">
+                <a:solidFill>
+                  <a:srgbClr val="555F6B"/>
+                </a:solidFill>
+                <a:latin typeface="Calibri"/>
+              </a:rPr>
+              <a:t>Product invariants drive the architecture:</a:t>
+            </a:r>
+          </a:p>
+        </p:txBody>
+      </p:sp>
+      <p:sp>
+        <p:nvSpPr>
+          <p:cNvPr id="7" name="Rounded Rectangle 6"/>
           <p:cNvSpPr/>
           <p:nvPr/>
         </p:nvSpPr>
         <p:spPr>
           <a:xfrm>
-            <a:off x="548640" y="1417320"/>
-            <a:ext cx="5303520" cy="1417320"/>
+            <a:off x="548640" y="1737360"/>
+            <a:ext cx="5349240" cy="1371600"/>
           </a:xfrm>
           <a:prstGeom prst="roundRect">
             <a:avLst>
@@ -5638,14 +8500,14 @@
       </p:sp>
       <p:sp>
         <p:nvSpPr>
-          <p:cNvPr id="7" name="Rectangle 6"/>
+          <p:cNvPr id="8" name="Rectangle 7"/>
           <p:cNvSpPr/>
           <p:nvPr/>
         </p:nvSpPr>
         <p:spPr>
           <a:xfrm>
-            <a:off x="548640" y="1417320"/>
-            <a:ext cx="73152" cy="1417320"/>
+            <a:off x="548640" y="1737360"/>
+            <a:ext cx="73152" cy="1371600"/>
           </a:xfrm>
           <a:prstGeom prst="rect">
             <a:avLst/>
@@ -5682,14 +8544,14 @@
       </p:sp>
       <p:sp>
         <p:nvSpPr>
-          <p:cNvPr id="8" name="TextBox 7"/>
+          <p:cNvPr id="9" name="TextBox 8"/>
           <p:cNvSpPr txBox="1"/>
           <p:nvPr/>
         </p:nvSpPr>
         <p:spPr>
           <a:xfrm>
-            <a:off x="822960" y="1527048"/>
-            <a:ext cx="4846320" cy="320040"/>
+            <a:off x="822960" y="1847088"/>
+            <a:ext cx="4892040" cy="320040"/>
           </a:xfrm>
           <a:prstGeom prst="rect">
             <a:avLst/>
@@ -5704,7 +8566,7 @@
           <a:p>
             <a:pPr algn="l"/>
             <a:r>
-              <a:rPr sz="1500" b="1" i="0">
+              <a:rPr sz="1400" b="1" i="0">
                 <a:solidFill>
                   <a:srgbClr val="0B213F"/>
                 </a:solidFill>
@@ -5717,14 +8579,14 @@
       </p:sp>
       <p:sp>
         <p:nvSpPr>
-          <p:cNvPr id="9" name="TextBox 8"/>
+          <p:cNvPr id="10" name="TextBox 9"/>
           <p:cNvSpPr txBox="1"/>
           <p:nvPr/>
         </p:nvSpPr>
         <p:spPr>
           <a:xfrm>
-            <a:off x="822960" y="1874520"/>
-            <a:ext cx="4846320" cy="914400"/>
+            <a:off x="822960" y="2176272"/>
+            <a:ext cx="4892040" cy="868680"/>
           </a:xfrm>
           <a:prstGeom prst="rect">
             <a:avLst/>
@@ -5739,7 +8601,7 @@
           <a:p>
             <a:pPr algn="l"/>
             <a:r>
-              <a:rPr sz="1150" b="0" i="0">
+              <a:rPr sz="1100" b="0" i="0">
                 <a:solidFill>
                   <a:srgbClr val="555F6B"/>
                 </a:solidFill>
@@ -5752,14 +8614,14 @@
       </p:sp>
       <p:sp>
         <p:nvSpPr>
-          <p:cNvPr id="10" name="Rounded Rectangle 9"/>
+          <p:cNvPr id="11" name="Rounded Rectangle 10"/>
           <p:cNvSpPr/>
           <p:nvPr/>
         </p:nvSpPr>
         <p:spPr>
           <a:xfrm>
-            <a:off x="6126480" y="1417320"/>
-            <a:ext cx="5303520" cy="1417320"/>
+            <a:off x="6172200" y="1737360"/>
+            <a:ext cx="5349240" cy="1371600"/>
           </a:xfrm>
           <a:prstGeom prst="roundRect">
             <a:avLst>
@@ -5800,14 +8662,14 @@
       </p:sp>
       <p:sp>
         <p:nvSpPr>
-          <p:cNvPr id="11" name="Rectangle 10"/>
+          <p:cNvPr id="12" name="Rectangle 11"/>
           <p:cNvSpPr/>
           <p:nvPr/>
         </p:nvSpPr>
         <p:spPr>
           <a:xfrm>
-            <a:off x="6126480" y="1417320"/>
-            <a:ext cx="73152" cy="1417320"/>
+            <a:off x="6172200" y="1737360"/>
+            <a:ext cx="73152" cy="1371600"/>
           </a:xfrm>
           <a:prstGeom prst="rect">
             <a:avLst/>
@@ -5844,14 +8706,14 @@
       </p:sp>
       <p:sp>
         <p:nvSpPr>
-          <p:cNvPr id="12" name="TextBox 11"/>
+          <p:cNvPr id="13" name="TextBox 12"/>
           <p:cNvSpPr txBox="1"/>
           <p:nvPr/>
         </p:nvSpPr>
         <p:spPr>
           <a:xfrm>
-            <a:off x="6400800" y="1527048"/>
-            <a:ext cx="4846320" cy="320040"/>
+            <a:off x="6446520" y="1847088"/>
+            <a:ext cx="4892040" cy="320040"/>
           </a:xfrm>
           <a:prstGeom prst="rect">
             <a:avLst/>
@@ -5866,7 +8728,7 @@
           <a:p>
             <a:pPr algn="l"/>
             <a:r>
-              <a:rPr sz="1500" b="1" i="0">
+              <a:rPr sz="1400" b="1" i="0">
                 <a:solidFill>
                   <a:srgbClr val="0B213F"/>
                 </a:solidFill>
@@ -5879,14 +8741,14 @@
       </p:sp>
       <p:sp>
         <p:nvSpPr>
-          <p:cNvPr id="13" name="TextBox 12"/>
+          <p:cNvPr id="14" name="TextBox 13"/>
           <p:cNvSpPr txBox="1"/>
           <p:nvPr/>
         </p:nvSpPr>
         <p:spPr>
           <a:xfrm>
-            <a:off x="6400800" y="1874520"/>
-            <a:ext cx="4846320" cy="914400"/>
+            <a:off x="6446520" y="2176272"/>
+            <a:ext cx="4892040" cy="868680"/>
           </a:xfrm>
           <a:prstGeom prst="rect">
             <a:avLst/>
@@ -5901,7 +8763,7 @@
           <a:p>
             <a:pPr algn="l"/>
             <a:r>
-              <a:rPr sz="1150" b="0" i="0">
+              <a:rPr sz="1100" b="0" i="0">
                 <a:solidFill>
                   <a:srgbClr val="555F6B"/>
                 </a:solidFill>
@@ -5914,14 +8776,14 @@
       </p:sp>
       <p:sp>
         <p:nvSpPr>
-          <p:cNvPr id="14" name="Rounded Rectangle 13"/>
+          <p:cNvPr id="15" name="Rounded Rectangle 14"/>
           <p:cNvSpPr/>
           <p:nvPr/>
         </p:nvSpPr>
         <p:spPr>
           <a:xfrm>
-            <a:off x="548640" y="3017520"/>
-            <a:ext cx="5303520" cy="1417320"/>
+            <a:off x="548640" y="3273552"/>
+            <a:ext cx="5349240" cy="1371600"/>
           </a:xfrm>
           <a:prstGeom prst="roundRect">
             <a:avLst>
@@ -5962,14 +8824,14 @@
       </p:sp>
       <p:sp>
         <p:nvSpPr>
-          <p:cNvPr id="15" name="Rectangle 14"/>
+          <p:cNvPr id="16" name="Rectangle 15"/>
           <p:cNvSpPr/>
           <p:nvPr/>
         </p:nvSpPr>
         <p:spPr>
           <a:xfrm>
-            <a:off x="548640" y="3017520"/>
-            <a:ext cx="73152" cy="1417320"/>
+            <a:off x="548640" y="3273552"/>
+            <a:ext cx="73152" cy="1371600"/>
           </a:xfrm>
           <a:prstGeom prst="rect">
             <a:avLst/>
@@ -6006,14 +8868,14 @@
       </p:sp>
       <p:sp>
         <p:nvSpPr>
-          <p:cNvPr id="16" name="TextBox 15"/>
+          <p:cNvPr id="17" name="TextBox 16"/>
           <p:cNvSpPr txBox="1"/>
           <p:nvPr/>
         </p:nvSpPr>
         <p:spPr>
           <a:xfrm>
-            <a:off x="822960" y="3127248"/>
-            <a:ext cx="4846320" cy="320040"/>
+            <a:off x="822960" y="3383280"/>
+            <a:ext cx="4892040" cy="320040"/>
           </a:xfrm>
           <a:prstGeom prst="rect">
             <a:avLst/>
@@ -6028,7 +8890,7 @@
           <a:p>
             <a:pPr algn="l"/>
             <a:r>
-              <a:rPr sz="1500" b="1" i="0">
+              <a:rPr sz="1400" b="1" i="0">
                 <a:solidFill>
                   <a:srgbClr val="0B213F"/>
                 </a:solidFill>
@@ -6041,14 +8903,14 @@
       </p:sp>
       <p:sp>
         <p:nvSpPr>
-          <p:cNvPr id="17" name="TextBox 16"/>
+          <p:cNvPr id="18" name="TextBox 17"/>
           <p:cNvSpPr txBox="1"/>
           <p:nvPr/>
         </p:nvSpPr>
         <p:spPr>
           <a:xfrm>
-            <a:off x="822960" y="3474720"/>
-            <a:ext cx="4846320" cy="914400"/>
+            <a:off x="822960" y="3712464"/>
+            <a:ext cx="4892040" cy="868680"/>
           </a:xfrm>
           <a:prstGeom prst="rect">
             <a:avLst/>
@@ -6063,7 +8925,7 @@
           <a:p>
             <a:pPr algn="l"/>
             <a:r>
-              <a:rPr sz="1150" b="0" i="0">
+              <a:rPr sz="1100" b="0" i="0">
                 <a:solidFill>
                   <a:srgbClr val="555F6B"/>
                 </a:solidFill>
@@ -6076,14 +8938,14 @@
       </p:sp>
       <p:sp>
         <p:nvSpPr>
-          <p:cNvPr id="18" name="Rounded Rectangle 17"/>
+          <p:cNvPr id="19" name="Rounded Rectangle 18"/>
           <p:cNvSpPr/>
           <p:nvPr/>
         </p:nvSpPr>
         <p:spPr>
           <a:xfrm>
-            <a:off x="6126480" y="3017520"/>
-            <a:ext cx="5303520" cy="1417320"/>
+            <a:off x="6172200" y="3273552"/>
+            <a:ext cx="5349240" cy="1371600"/>
           </a:xfrm>
           <a:prstGeom prst="roundRect">
             <a:avLst>
@@ -6124,14 +8986,14 @@
       </p:sp>
       <p:sp>
         <p:nvSpPr>
-          <p:cNvPr id="19" name="Rectangle 18"/>
+          <p:cNvPr id="20" name="Rectangle 19"/>
           <p:cNvSpPr/>
           <p:nvPr/>
         </p:nvSpPr>
         <p:spPr>
           <a:xfrm>
-            <a:off x="6126480" y="3017520"/>
-            <a:ext cx="73152" cy="1417320"/>
+            <a:off x="6172200" y="3273552"/>
+            <a:ext cx="73152" cy="1371600"/>
           </a:xfrm>
           <a:prstGeom prst="rect">
             <a:avLst/>
@@ -6168,14 +9030,14 @@
       </p:sp>
       <p:sp>
         <p:nvSpPr>
-          <p:cNvPr id="20" name="TextBox 19"/>
+          <p:cNvPr id="21" name="TextBox 20"/>
           <p:cNvSpPr txBox="1"/>
           <p:nvPr/>
         </p:nvSpPr>
         <p:spPr>
           <a:xfrm>
-            <a:off x="6400800" y="3127248"/>
-            <a:ext cx="4846320" cy="320040"/>
+            <a:off x="6446520" y="3383280"/>
+            <a:ext cx="4892040" cy="320040"/>
           </a:xfrm>
           <a:prstGeom prst="rect">
             <a:avLst/>
@@ -6190,7 +9052,7 @@
           <a:p>
             <a:pPr algn="l"/>
             <a:r>
-              <a:rPr sz="1500" b="1" i="0">
+              <a:rPr sz="1400" b="1" i="0">
                 <a:solidFill>
                   <a:srgbClr val="0B213F"/>
                 </a:solidFill>
@@ -6203,14 +9065,14 @@
       </p:sp>
       <p:sp>
         <p:nvSpPr>
-          <p:cNvPr id="21" name="TextBox 20"/>
+          <p:cNvPr id="22" name="TextBox 21"/>
           <p:cNvSpPr txBox="1"/>
           <p:nvPr/>
         </p:nvSpPr>
         <p:spPr>
           <a:xfrm>
-            <a:off x="6400800" y="3474720"/>
-            <a:ext cx="4846320" cy="914400"/>
+            <a:off x="6446520" y="3712464"/>
+            <a:ext cx="4892040" cy="868680"/>
           </a:xfrm>
           <a:prstGeom prst="rect">
             <a:avLst/>
@@ -6225,7 +9087,7 @@
           <a:p>
             <a:pPr algn="l"/>
             <a:r>
-              <a:rPr sz="1150" b="0" i="0">
+              <a:rPr sz="1100" b="0" i="0">
                 <a:solidFill>
                   <a:srgbClr val="555F6B"/>
                 </a:solidFill>
@@ -6238,14 +9100,14 @@
       </p:sp>
       <p:sp>
         <p:nvSpPr>
-          <p:cNvPr id="22" name="Rounded Rectangle 21"/>
+          <p:cNvPr id="23" name="Rounded Rectangle 22"/>
           <p:cNvSpPr/>
           <p:nvPr/>
         </p:nvSpPr>
         <p:spPr>
           <a:xfrm>
-            <a:off x="548640" y="4617720"/>
-            <a:ext cx="5303520" cy="1417320"/>
+            <a:off x="548640" y="4809744"/>
+            <a:ext cx="5349240" cy="1371600"/>
           </a:xfrm>
           <a:prstGeom prst="roundRect">
             <a:avLst>
@@ -6286,14 +9148,14 @@
       </p:sp>
       <p:sp>
         <p:nvSpPr>
-          <p:cNvPr id="23" name="Rectangle 22"/>
+          <p:cNvPr id="24" name="Rectangle 23"/>
           <p:cNvSpPr/>
           <p:nvPr/>
         </p:nvSpPr>
         <p:spPr>
           <a:xfrm>
-            <a:off x="548640" y="4617720"/>
-            <a:ext cx="73152" cy="1417320"/>
+            <a:off x="548640" y="4809744"/>
+            <a:ext cx="73152" cy="1371600"/>
           </a:xfrm>
           <a:prstGeom prst="rect">
             <a:avLst/>
@@ -6330,14 +9192,14 @@
       </p:sp>
       <p:sp>
         <p:nvSpPr>
-          <p:cNvPr id="24" name="TextBox 23"/>
+          <p:cNvPr id="25" name="TextBox 24"/>
           <p:cNvSpPr txBox="1"/>
           <p:nvPr/>
         </p:nvSpPr>
         <p:spPr>
           <a:xfrm>
-            <a:off x="822960" y="4727448"/>
-            <a:ext cx="4846320" cy="320040"/>
+            <a:off x="822960" y="4919472"/>
+            <a:ext cx="4892040" cy="320040"/>
           </a:xfrm>
           <a:prstGeom prst="rect">
             <a:avLst/>
@@ -6352,7 +9214,7 @@
           <a:p>
             <a:pPr algn="l"/>
             <a:r>
-              <a:rPr sz="1500" b="1" i="0">
+              <a:rPr sz="1400" b="1" i="0">
                 <a:solidFill>
                   <a:srgbClr val="0B213F"/>
                 </a:solidFill>
@@ -6365,14 +9227,14 @@
       </p:sp>
       <p:sp>
         <p:nvSpPr>
-          <p:cNvPr id="25" name="TextBox 24"/>
+          <p:cNvPr id="26" name="TextBox 25"/>
           <p:cNvSpPr txBox="1"/>
           <p:nvPr/>
         </p:nvSpPr>
         <p:spPr>
           <a:xfrm>
-            <a:off x="822960" y="5074920"/>
-            <a:ext cx="4846320" cy="914400"/>
+            <a:off x="822960" y="5248656"/>
+            <a:ext cx="4892040" cy="868680"/>
           </a:xfrm>
           <a:prstGeom prst="rect">
             <a:avLst/>
@@ -6387,7 +9249,7 @@
           <a:p>
             <a:pPr algn="l"/>
             <a:r>
-              <a:rPr sz="1150" b="0" i="0">
+              <a:rPr sz="1100" b="0" i="0">
                 <a:solidFill>
                   <a:srgbClr val="555F6B"/>
                 </a:solidFill>
@@ -6400,14 +9262,14 @@
       </p:sp>
       <p:sp>
         <p:nvSpPr>
-          <p:cNvPr id="26" name="Rounded Rectangle 25"/>
+          <p:cNvPr id="27" name="Rounded Rectangle 26"/>
           <p:cNvSpPr/>
           <p:nvPr/>
         </p:nvSpPr>
         <p:spPr>
           <a:xfrm>
-            <a:off x="6126480" y="4617720"/>
-            <a:ext cx="5303520" cy="1417320"/>
+            <a:off x="6172200" y="4809744"/>
+            <a:ext cx="5349240" cy="1371600"/>
           </a:xfrm>
           <a:prstGeom prst="roundRect">
             <a:avLst>
@@ -6448,14 +9310,14 @@
       </p:sp>
       <p:sp>
         <p:nvSpPr>
-          <p:cNvPr id="27" name="Rectangle 26"/>
+          <p:cNvPr id="28" name="Rectangle 27"/>
           <p:cNvSpPr/>
           <p:nvPr/>
         </p:nvSpPr>
         <p:spPr>
           <a:xfrm>
-            <a:off x="6126480" y="4617720"/>
-            <a:ext cx="73152" cy="1417320"/>
+            <a:off x="6172200" y="4809744"/>
+            <a:ext cx="73152" cy="1371600"/>
           </a:xfrm>
           <a:prstGeom prst="rect">
             <a:avLst/>
@@ -6492,14 +9354,14 @@
       </p:sp>
       <p:sp>
         <p:nvSpPr>
-          <p:cNvPr id="28" name="TextBox 27"/>
+          <p:cNvPr id="29" name="TextBox 28"/>
           <p:cNvSpPr txBox="1"/>
           <p:nvPr/>
         </p:nvSpPr>
         <p:spPr>
           <a:xfrm>
-            <a:off x="6400800" y="4727448"/>
-            <a:ext cx="4846320" cy="320040"/>
+            <a:off x="6446520" y="4919472"/>
+            <a:ext cx="4892040" cy="320040"/>
           </a:xfrm>
           <a:prstGeom prst="rect">
             <a:avLst/>
@@ -6514,7 +9376,7 @@
           <a:p>
             <a:pPr algn="l"/>
             <a:r>
-              <a:rPr sz="1500" b="1" i="0">
+              <a:rPr sz="1400" b="1" i="0">
                 <a:solidFill>
                   <a:srgbClr val="0B213F"/>
                 </a:solidFill>
@@ -6527,14 +9389,14 @@
       </p:sp>
       <p:sp>
         <p:nvSpPr>
-          <p:cNvPr id="29" name="TextBox 28"/>
+          <p:cNvPr id="30" name="TextBox 29"/>
           <p:cNvSpPr txBox="1"/>
           <p:nvPr/>
         </p:nvSpPr>
         <p:spPr>
           <a:xfrm>
-            <a:off x="6400800" y="5074920"/>
-            <a:ext cx="4846320" cy="914400"/>
+            <a:off x="6446520" y="5248656"/>
+            <a:ext cx="4892040" cy="868680"/>
           </a:xfrm>
           <a:prstGeom prst="rect">
             <a:avLst/>
@@ -6549,7 +9411,7 @@
           <a:p>
             <a:pPr algn="l"/>
             <a:r>
-              <a:rPr sz="1150" b="0" i="0">
+              <a:rPr sz="1100" b="0" i="0">
                 <a:solidFill>
                   <a:srgbClr val="555F6B"/>
                 </a:solidFill>
@@ -6562,7 +9424,7 @@
       </p:sp>
       <p:sp>
         <p:nvSpPr>
-          <p:cNvPr id="30" name="TextBox 29"/>
+          <p:cNvPr id="31" name="TextBox 30"/>
           <p:cNvSpPr txBox="1"/>
           <p:nvPr/>
         </p:nvSpPr>
@@ -6597,7 +9459,7 @@
       </p:sp>
       <p:sp>
         <p:nvSpPr>
-          <p:cNvPr id="31" name="TextBox 30"/>
+          <p:cNvPr id="32" name="TextBox 31"/>
           <p:cNvSpPr txBox="1"/>
           <p:nvPr/>
         </p:nvSpPr>
@@ -6730,7 +9592,7 @@
                 </a:solidFill>
                 <a:latin typeface="Calibri"/>
               </a:rPr>
-              <a:t>SYSTEM LANDSCAPE</a:t>
+              <a:t>SECTION 2</a:t>
             </a:r>
           </a:p>
         </p:txBody>
@@ -6759,13 +9621,13 @@
           <a:p>
             <a:pPr algn="l"/>
             <a:r>
-              <a:rPr sz="2800" b="1" i="0">
+              <a:rPr sz="2600" b="1" i="0">
                 <a:solidFill>
                   <a:srgbClr val="0B213F"/>
                 </a:solidFill>
                 <a:latin typeface="Calibri"/>
               </a:rPr>
-              <a:t>Apps, Shared Packages &amp; Boundaries</a:t>
+              <a:t>System Landscape</a:t>
             </a:r>
           </a:p>
         </p:txBody>
@@ -6822,7 +9684,7 @@
         </p:nvSpPr>
         <p:spPr>
           <a:xfrm>
-            <a:off x="685800" y="1417320"/>
+            <a:off x="685800" y="1371600"/>
             <a:ext cx="2834640" cy="822960"/>
           </a:xfrm>
           <a:prstGeom prst="roundRect">
@@ -6870,7 +9732,7 @@
         </p:nvSpPr>
         <p:spPr>
           <a:xfrm>
-            <a:off x="685800" y="1472184"/>
+            <a:off x="685800" y="1426464"/>
             <a:ext cx="2834640" cy="274320"/>
           </a:xfrm>
           <a:prstGeom prst="rect">
@@ -6905,7 +9767,7 @@
         </p:nvSpPr>
         <p:spPr>
           <a:xfrm>
-            <a:off x="685800" y="1764792"/>
+            <a:off x="685800" y="1719072"/>
             <a:ext cx="2834640" cy="457200"/>
           </a:xfrm>
           <a:prstGeom prst="rect">
@@ -6952,7 +9814,7 @@
         </p:nvSpPr>
         <p:spPr>
           <a:xfrm>
-            <a:off x="3840480" y="1417320"/>
+            <a:off x="3840480" y="1371600"/>
             <a:ext cx="2834640" cy="822960"/>
           </a:xfrm>
           <a:prstGeom prst="roundRect">
@@ -7000,7 +9862,7 @@
         </p:nvSpPr>
         <p:spPr>
           <a:xfrm>
-            <a:off x="3840480" y="1472184"/>
+            <a:off x="3840480" y="1426464"/>
             <a:ext cx="2834640" cy="274320"/>
           </a:xfrm>
           <a:prstGeom prst="rect">
@@ -7035,7 +9897,7 @@
         </p:nvSpPr>
         <p:spPr>
           <a:xfrm>
-            <a:off x="3840480" y="1764792"/>
+            <a:off x="3840480" y="1719072"/>
             <a:ext cx="2834640" cy="457200"/>
           </a:xfrm>
           <a:prstGeom prst="rect">
@@ -7082,7 +9944,7 @@
         </p:nvSpPr>
         <p:spPr>
           <a:xfrm>
-            <a:off x="6995160" y="1417320"/>
+            <a:off x="6995160" y="1371600"/>
             <a:ext cx="2834640" cy="822960"/>
           </a:xfrm>
           <a:prstGeom prst="roundRect">
@@ -7130,7 +9992,7 @@
         </p:nvSpPr>
         <p:spPr>
           <a:xfrm>
-            <a:off x="6995160" y="1472184"/>
+            <a:off x="6995160" y="1426464"/>
             <a:ext cx="2834640" cy="274320"/>
           </a:xfrm>
           <a:prstGeom prst="rect">
@@ -7165,7 +10027,7 @@
         </p:nvSpPr>
         <p:spPr>
           <a:xfrm>
-            <a:off x="6995160" y="1764792"/>
+            <a:off x="6995160" y="1719072"/>
             <a:ext cx="2834640" cy="457200"/>
           </a:xfrm>
           <a:prstGeom prst="rect">
@@ -7212,7 +10074,7 @@
         </p:nvSpPr>
         <p:spPr>
           <a:xfrm>
-            <a:off x="10012680" y="1417320"/>
+            <a:off x="10012680" y="1371600"/>
             <a:ext cx="2377440" cy="822960"/>
           </a:xfrm>
           <a:prstGeom prst="roundRect">
@@ -7260,7 +10122,7 @@
         </p:nvSpPr>
         <p:spPr>
           <a:xfrm>
-            <a:off x="10012680" y="1472184"/>
+            <a:off x="10012680" y="1426464"/>
             <a:ext cx="2377440" cy="274320"/>
           </a:xfrm>
           <a:prstGeom prst="rect">
@@ -7295,7 +10157,7 @@
         </p:nvSpPr>
         <p:spPr>
           <a:xfrm>
-            <a:off x="10012680" y="1764792"/>
+            <a:off x="10012680" y="1719072"/>
             <a:ext cx="2377440" cy="457200"/>
           </a:xfrm>
           <a:prstGeom prst="rect">
@@ -7342,7 +10204,7 @@
         </p:nvCxnSpPr>
         <p:spPr>
           <a:xfrm>
-            <a:off x="2103120.0" y="2240280"/>
+            <a:off x="2103120.0" y="2194560"/>
             <a:ext cx="0.0" cy="548640"/>
           </a:xfrm>
           <a:prstGeom prst="bentConnector3">
@@ -7378,7 +10240,7 @@
         </p:nvCxnSpPr>
         <p:spPr>
           <a:xfrm>
-            <a:off x="5257800.0" y="2240280"/>
+            <a:off x="5257800.0" y="2194560"/>
             <a:ext cx="0.0" cy="548640"/>
           </a:xfrm>
           <a:prstGeom prst="bentConnector3">
@@ -7414,7 +10276,7 @@
         </p:nvCxnSpPr>
         <p:spPr>
           <a:xfrm>
-            <a:off x="8412480.0" y="2240280"/>
+            <a:off x="8412480.0" y="2194560"/>
             <a:ext cx="0.0" cy="548640"/>
           </a:xfrm>
           <a:prstGeom prst="bentConnector3">
@@ -7450,7 +10312,7 @@
         </p:nvSpPr>
         <p:spPr>
           <a:xfrm>
-            <a:off x="685800" y="2788920"/>
+            <a:off x="685800" y="2743200"/>
             <a:ext cx="8321040" cy="777240"/>
           </a:xfrm>
           <a:prstGeom prst="roundRect">
@@ -7498,7 +10360,7 @@
         </p:nvSpPr>
         <p:spPr>
           <a:xfrm>
-            <a:off x="685800" y="2862072"/>
+            <a:off x="685800" y="2816352"/>
             <a:ext cx="8321040" cy="274320"/>
           </a:xfrm>
           <a:prstGeom prst="rect">
@@ -7533,7 +10395,7 @@
         </p:nvSpPr>
         <p:spPr>
           <a:xfrm>
-            <a:off x="685800" y="3154680"/>
+            <a:off x="685800" y="3108960"/>
             <a:ext cx="8321040" cy="365760"/>
           </a:xfrm>
           <a:prstGeom prst="rect">
@@ -7568,8 +10430,8 @@
         </p:nvSpPr>
         <p:spPr>
           <a:xfrm>
-            <a:off x="685800" y="3977639"/>
-            <a:ext cx="1249680" cy="502920"/>
+            <a:off x="685800" y="3886200"/>
+            <a:ext cx="1249680" cy="457200"/>
           </a:xfrm>
           <a:prstGeom prst="roundRect">
             <a:avLst>
@@ -7616,8 +10478,8 @@
         </p:nvSpPr>
         <p:spPr>
           <a:xfrm>
-            <a:off x="685800" y="3977639"/>
-            <a:ext cx="1249680" cy="502920"/>
+            <a:off x="685800" y="3886200"/>
+            <a:ext cx="1249680" cy="457200"/>
           </a:xfrm>
           <a:prstGeom prst="rect">
             <a:avLst/>
@@ -7651,8 +10513,8 @@
         </p:nvSpPr>
         <p:spPr>
           <a:xfrm>
-            <a:off x="2100072" y="3977639"/>
-            <a:ext cx="1249680" cy="502920"/>
+            <a:off x="2100072" y="3886200"/>
+            <a:ext cx="1249680" cy="457200"/>
           </a:xfrm>
           <a:prstGeom prst="roundRect">
             <a:avLst>
@@ -7699,8 +10561,8 @@
         </p:nvSpPr>
         <p:spPr>
           <a:xfrm>
-            <a:off x="2100072" y="3977639"/>
-            <a:ext cx="1249680" cy="502920"/>
+            <a:off x="2100072" y="3886200"/>
+            <a:ext cx="1249680" cy="457200"/>
           </a:xfrm>
           <a:prstGeom prst="rect">
             <a:avLst/>
@@ -7734,8 +10596,8 @@
         </p:nvSpPr>
         <p:spPr>
           <a:xfrm>
-            <a:off x="3514344" y="3977639"/>
-            <a:ext cx="1249680" cy="502920"/>
+            <a:off x="3514344" y="3886200"/>
+            <a:ext cx="1249680" cy="457200"/>
           </a:xfrm>
           <a:prstGeom prst="roundRect">
             <a:avLst>
@@ -7782,8 +10644,8 @@
         </p:nvSpPr>
         <p:spPr>
           <a:xfrm>
-            <a:off x="3514344" y="3977639"/>
-            <a:ext cx="1249680" cy="502920"/>
+            <a:off x="3514344" y="3886200"/>
+            <a:ext cx="1249680" cy="457200"/>
           </a:xfrm>
           <a:prstGeom prst="rect">
             <a:avLst/>
@@ -7817,8 +10679,8 @@
         </p:nvSpPr>
         <p:spPr>
           <a:xfrm>
-            <a:off x="4928616" y="3977639"/>
-            <a:ext cx="1249680" cy="502920"/>
+            <a:off x="4928616" y="3886200"/>
+            <a:ext cx="1249680" cy="457200"/>
           </a:xfrm>
           <a:prstGeom prst="roundRect">
             <a:avLst>
@@ -7865,8 +10727,8 @@
         </p:nvSpPr>
         <p:spPr>
           <a:xfrm>
-            <a:off x="4928616" y="3977639"/>
-            <a:ext cx="1249680" cy="502920"/>
+            <a:off x="4928616" y="3886200"/>
+            <a:ext cx="1249680" cy="457200"/>
           </a:xfrm>
           <a:prstGeom prst="rect">
             <a:avLst/>
@@ -7900,8 +10762,8 @@
         </p:nvSpPr>
         <p:spPr>
           <a:xfrm>
-            <a:off x="6342888" y="3977639"/>
-            <a:ext cx="1249680" cy="502920"/>
+            <a:off x="6342888" y="3886200"/>
+            <a:ext cx="1249680" cy="457200"/>
           </a:xfrm>
           <a:prstGeom prst="roundRect">
             <a:avLst>
@@ -7948,8 +10810,8 @@
         </p:nvSpPr>
         <p:spPr>
           <a:xfrm>
-            <a:off x="6342888" y="3977639"/>
-            <a:ext cx="1249680" cy="502920"/>
+            <a:off x="6342888" y="3886200"/>
+            <a:ext cx="1249680" cy="457200"/>
           </a:xfrm>
           <a:prstGeom prst="rect">
             <a:avLst/>
@@ -7983,8 +10845,8 @@
         </p:nvSpPr>
         <p:spPr>
           <a:xfrm>
-            <a:off x="7757160" y="3977639"/>
-            <a:ext cx="1249680" cy="502920"/>
+            <a:off x="7757160" y="3886200"/>
+            <a:ext cx="1249680" cy="457200"/>
           </a:xfrm>
           <a:prstGeom prst="roundRect">
             <a:avLst>
@@ -8031,8 +10893,8 @@
         </p:nvSpPr>
         <p:spPr>
           <a:xfrm>
-            <a:off x="7757160" y="3977639"/>
-            <a:ext cx="1249680" cy="502920"/>
+            <a:off x="7757160" y="3886200"/>
+            <a:ext cx="1249680" cy="457200"/>
           </a:xfrm>
           <a:prstGeom prst="rect">
             <a:avLst/>
@@ -8066,8 +10928,8 @@
         </p:nvCxnSpPr>
         <p:spPr>
           <a:xfrm flipV="1">
-            <a:off x="4846320.0" y="3566160"/>
-            <a:ext cx="0.0" cy="411479"/>
+            <a:off x="4846320.0" y="3520440"/>
+            <a:ext cx="0.0" cy="365760"/>
           </a:xfrm>
           <a:prstGeom prst="bentConnector3">
             <a:avLst/>
@@ -8102,8 +10964,8 @@
         </p:nvSpPr>
         <p:spPr>
           <a:xfrm>
-            <a:off x="685800" y="3721607"/>
-            <a:ext cx="8321040" cy="228600"/>
+            <a:off x="685800" y="3648456"/>
+            <a:ext cx="8321040" cy="219456"/>
           </a:xfrm>
           <a:prstGeom prst="rect">
             <a:avLst/>
@@ -8137,8 +10999,8 @@
         </p:nvCxnSpPr>
         <p:spPr>
           <a:xfrm>
-            <a:off x="2514600" y="3566160"/>
-            <a:ext cx="0" cy="1325880"/>
+            <a:off x="2514600" y="3520440"/>
+            <a:ext cx="0" cy="1188720"/>
           </a:xfrm>
           <a:prstGeom prst="bentConnector3">
             <a:avLst/>
@@ -8173,8 +11035,8 @@
         </p:nvSpPr>
         <p:spPr>
           <a:xfrm>
-            <a:off x="685800" y="4892040"/>
-            <a:ext cx="3931920" cy="777240"/>
+            <a:off x="685800" y="4709160"/>
+            <a:ext cx="3931920" cy="731520"/>
           </a:xfrm>
           <a:prstGeom prst="roundRect">
             <a:avLst>
@@ -8221,7 +11083,7 @@
         </p:nvSpPr>
         <p:spPr>
           <a:xfrm>
-            <a:off x="685800" y="4965192"/>
+            <a:off x="685800" y="4764024"/>
             <a:ext cx="3931920" cy="274320"/>
           </a:xfrm>
           <a:prstGeom prst="rect">
@@ -8237,7 +11099,7 @@
           <a:p>
             <a:pPr algn="ctr"/>
             <a:r>
-              <a:rPr sz="1300" b="1" i="0">
+              <a:rPr sz="1200" b="1" i="0">
                 <a:solidFill>
                   <a:srgbClr val="0B213F"/>
                 </a:solidFill>
@@ -8256,8 +11118,8 @@
         </p:nvSpPr>
         <p:spPr>
           <a:xfrm>
-            <a:off x="685800" y="5257800"/>
-            <a:ext cx="3931920" cy="365760"/>
+            <a:off x="685800" y="5056632"/>
+            <a:ext cx="3931920" cy="329184"/>
           </a:xfrm>
           <a:prstGeom prst="rect">
             <a:avLst/>
@@ -8291,8 +11153,8 @@
         </p:nvCxnSpPr>
         <p:spPr>
           <a:xfrm>
-            <a:off x="6949440" y="3566160"/>
-            <a:ext cx="0" cy="1325880"/>
+            <a:off x="6949440" y="3520440"/>
+            <a:ext cx="0" cy="1188720"/>
           </a:xfrm>
           <a:prstGeom prst="bentConnector3">
             <a:avLst/>
@@ -8327,8 +11189,8 @@
         </p:nvSpPr>
         <p:spPr>
           <a:xfrm>
-            <a:off x="4983480" y="4892040"/>
-            <a:ext cx="4023360" cy="777240"/>
+            <a:off x="4983480" y="4709160"/>
+            <a:ext cx="4023360" cy="731520"/>
           </a:xfrm>
           <a:prstGeom prst="roundRect">
             <a:avLst>
@@ -8375,7 +11237,7 @@
         </p:nvSpPr>
         <p:spPr>
           <a:xfrm>
-            <a:off x="4983480" y="4965192"/>
+            <a:off x="4983480" y="4764024"/>
             <a:ext cx="4023360" cy="274320"/>
           </a:xfrm>
           <a:prstGeom prst="rect">
@@ -8391,7 +11253,7 @@
           <a:p>
             <a:pPr algn="ctr"/>
             <a:r>
-              <a:rPr sz="1300" b="1" i="0">
+              <a:rPr sz="1200" b="1" i="0">
                 <a:solidFill>
                   <a:srgbClr val="555F6B"/>
                 </a:solidFill>
@@ -8410,8 +11272,8 @@
         </p:nvSpPr>
         <p:spPr>
           <a:xfrm>
-            <a:off x="4983480" y="5257800"/>
-            <a:ext cx="4023360" cy="365760"/>
+            <a:off x="4983480" y="5056632"/>
+            <a:ext cx="4023360" cy="329184"/>
           </a:xfrm>
           <a:prstGeom prst="rect">
             <a:avLst/>
@@ -8445,7 +11307,7 @@
         </p:nvSpPr>
         <p:spPr>
           <a:xfrm>
-            <a:off x="548640" y="5989320"/>
+            <a:off x="548640" y="5623560"/>
             <a:ext cx="10972800" cy="457200"/>
           </a:xfrm>
           <a:prstGeom prst="rect">
@@ -8642,7 +11504,7 @@
                 </a:solidFill>
                 <a:latin typeface="Calibri"/>
               </a:rPr>
-              <a:t>DEPLOYMENT</a:t>
+              <a:t>SECTION 3</a:t>
             </a:r>
           </a:p>
         </p:txBody>
@@ -8671,13 +11533,13 @@
           <a:p>
             <a:pPr algn="l"/>
             <a:r>
-              <a:rPr sz="2800" b="1" i="0">
+              <a:rPr sz="2600" b="1" i="0">
                 <a:solidFill>
                   <a:srgbClr val="0B213F"/>
                 </a:solidFill>
                 <a:latin typeface="Calibri"/>
               </a:rPr>
-              <a:t>Azure Runtime — Lean Single-Environment Pilot</a:t>
+              <a:t>Deployment Architecture — Azure Lean Single-Environment Pilot</a:t>
             </a:r>
           </a:p>
         </p:txBody>
@@ -8734,8 +11596,8 @@
         </p:nvSpPr>
         <p:spPr>
           <a:xfrm>
-            <a:off x="548640" y="1371600"/>
-            <a:ext cx="11064240" cy="4297680"/>
+            <a:off x="548640" y="1417320"/>
+            <a:ext cx="11064240" cy="4160520"/>
           </a:xfrm>
           <a:prstGeom prst="roundRect">
             <a:avLst>
@@ -8782,7 +11644,7 @@
         </p:nvSpPr>
         <p:spPr>
           <a:xfrm>
-            <a:off x="777240" y="1463040"/>
+            <a:off x="777240" y="1508760"/>
             <a:ext cx="5486400" cy="320040"/>
           </a:xfrm>
           <a:prstGeom prst="rect">
@@ -8818,7 +11680,7 @@
         <p:spPr>
           <a:xfrm>
             <a:off x="822960" y="1920240"/>
-            <a:ext cx="7040880" cy="2651760"/>
+            <a:ext cx="7040880" cy="2468880"/>
           </a:xfrm>
           <a:prstGeom prst="roundRect">
             <a:avLst>
@@ -8901,7 +11763,7 @@
         <p:spPr>
           <a:xfrm>
             <a:off x="1005840" y="2331720"/>
-            <a:ext cx="6675120" cy="566928"/>
+            <a:ext cx="6675120" cy="548640"/>
           </a:xfrm>
           <a:prstGeom prst="roundRect">
             <a:avLst>
@@ -9018,8 +11880,8 @@
         </p:nvSpPr>
         <p:spPr>
           <a:xfrm>
-            <a:off x="1005840" y="2990088"/>
-            <a:ext cx="6675120" cy="566928"/>
+            <a:off x="1005840" y="2971800"/>
+            <a:ext cx="6675120" cy="548640"/>
           </a:xfrm>
           <a:prstGeom prst="roundRect">
             <a:avLst>
@@ -9066,7 +11928,7 @@
         </p:nvSpPr>
         <p:spPr>
           <a:xfrm>
-            <a:off x="1188720" y="3044952"/>
+            <a:off x="1188720" y="3026664"/>
             <a:ext cx="3657600" cy="274320"/>
           </a:xfrm>
           <a:prstGeom prst="rect">
@@ -9101,7 +11963,7 @@
         </p:nvSpPr>
         <p:spPr>
           <a:xfrm>
-            <a:off x="4572000" y="3044952"/>
+            <a:off x="4572000" y="3026664"/>
             <a:ext cx="2926080" cy="274320"/>
           </a:xfrm>
           <a:prstGeom prst="rect">
@@ -9136,8 +11998,8 @@
         </p:nvSpPr>
         <p:spPr>
           <a:xfrm>
-            <a:off x="1005840" y="3648456"/>
-            <a:ext cx="6675120" cy="566928"/>
+            <a:off x="1005840" y="3611880"/>
+            <a:ext cx="6675120" cy="548640"/>
           </a:xfrm>
           <a:prstGeom prst="roundRect">
             <a:avLst>
@@ -9184,7 +12046,7 @@
         </p:nvSpPr>
         <p:spPr>
           <a:xfrm>
-            <a:off x="1188720" y="3703320"/>
+            <a:off x="1188720" y="3666744"/>
             <a:ext cx="3657600" cy="274320"/>
           </a:xfrm>
           <a:prstGeom prst="rect">
@@ -9219,7 +12081,7 @@
         </p:nvSpPr>
         <p:spPr>
           <a:xfrm>
-            <a:off x="4572000" y="3703320"/>
+            <a:off x="4572000" y="3666744"/>
             <a:ext cx="2926080" cy="274320"/>
           </a:xfrm>
           <a:prstGeom prst="rect">
@@ -9255,7 +12117,7 @@
         <p:spPr>
           <a:xfrm>
             <a:off x="8229600" y="1920240"/>
-            <a:ext cx="3108960" cy="1188720"/>
+            <a:ext cx="3108960" cy="1097280"/>
           </a:xfrm>
           <a:prstGeom prst="roundRect">
             <a:avLst>
@@ -9337,8 +12199,8 @@
         </p:nvSpPr>
         <p:spPr>
           <a:xfrm>
-            <a:off x="8229600" y="2331720"/>
-            <a:ext cx="3108960" cy="685800"/>
+            <a:off x="8229600" y="2304288"/>
+            <a:ext cx="3108960" cy="640080"/>
           </a:xfrm>
           <a:prstGeom prst="rect">
             <a:avLst/>
@@ -9384,8 +12246,8 @@
         </p:nvSpPr>
         <p:spPr>
           <a:xfrm>
-            <a:off x="8229600" y="3246120"/>
-            <a:ext cx="3108960" cy="685800"/>
+            <a:off x="8229600" y="3154680"/>
+            <a:ext cx="3108960" cy="640080"/>
           </a:xfrm>
           <a:prstGeom prst="roundRect">
             <a:avLst>
@@ -9432,8 +12294,8 @@
         </p:nvSpPr>
         <p:spPr>
           <a:xfrm>
-            <a:off x="8229600" y="3246120"/>
-            <a:ext cx="3108960" cy="685800"/>
+            <a:off x="8229600" y="3154680"/>
+            <a:ext cx="3108960" cy="640080"/>
           </a:xfrm>
           <a:prstGeom prst="rect">
             <a:avLst/>
@@ -9467,8 +12329,8 @@
         </p:nvSpPr>
         <p:spPr>
           <a:xfrm>
-            <a:off x="8229600" y="4069080"/>
-            <a:ext cx="3108960" cy="502920"/>
+            <a:off x="8229600" y="3913632"/>
+            <a:ext cx="3108960" cy="475488"/>
           </a:xfrm>
           <a:prstGeom prst="roundRect">
             <a:avLst>
@@ -9515,8 +12377,8 @@
         </p:nvSpPr>
         <p:spPr>
           <a:xfrm>
-            <a:off x="8229600" y="4069080"/>
-            <a:ext cx="3108960" cy="502920"/>
+            <a:off x="8229600" y="3913632"/>
+            <a:ext cx="3108960" cy="475488"/>
           </a:xfrm>
           <a:prstGeom prst="rect">
             <a:avLst/>
@@ -9550,8 +12412,8 @@
         </p:nvSpPr>
         <p:spPr>
           <a:xfrm>
-            <a:off x="822960" y="4754880"/>
-            <a:ext cx="10515600" cy="777240"/>
+            <a:off x="822960" y="4572000"/>
+            <a:ext cx="10515600" cy="868680"/>
           </a:xfrm>
           <a:prstGeom prst="roundRect">
             <a:avLst>
@@ -9598,7 +12460,7 @@
         </p:nvSpPr>
         <p:spPr>
           <a:xfrm>
-            <a:off x="1005840" y="4828032"/>
+            <a:off x="1005840" y="4645152"/>
             <a:ext cx="10149840" cy="274320"/>
           </a:xfrm>
           <a:prstGeom prst="rect">
@@ -9633,8 +12495,8 @@
         </p:nvSpPr>
         <p:spPr>
           <a:xfrm>
-            <a:off x="1005840" y="5120640"/>
-            <a:ext cx="10149840" cy="320040"/>
+            <a:off x="1005840" y="4956048"/>
+            <a:ext cx="10149840" cy="411480"/>
           </a:xfrm>
           <a:prstGeom prst="rect">
             <a:avLst/>
@@ -9877,7 +12739,7 @@
                 </a:solidFill>
                 <a:latin typeface="Calibri"/>
               </a:rPr>
-              <a:t>DATA &amp; TENANCY</a:t>
+              <a:t>SECTION 4</a:t>
             </a:r>
           </a:p>
         </p:txBody>
@@ -9906,13 +12768,13 @@
           <a:p>
             <a:pPr algn="l"/>
             <a:r>
-              <a:rPr sz="2800" b="1" i="0">
+              <a:rPr sz="2600" b="1" i="0">
                 <a:solidFill>
                   <a:srgbClr val="0B213F"/>
                 </a:solidFill>
                 <a:latin typeface="Calibri"/>
               </a:rPr>
-              <a:t>Organization Isolation and Financial Integrity</a:t>
+              <a:t>Data, Tenancy &amp; Financial Integrity</a:t>
             </a:r>
           </a:p>
         </p:txBody>
@@ -10122,7 +12984,7 @@
                 </a:solidFill>
                 <a:latin typeface="Calibri"/>
               </a:rPr>
-              <a:t>The API resolves membership and authorizes every command/query</a:t>
+              <a:t>The API authorizes every command/query before persistence access —</a:t>
             </a:r>
           </a:p>
           <a:p>
@@ -10134,7 +12996,7 @@
                 </a:solidFill>
                 <a:latin typeface="Calibri"/>
               </a:rPr>
-              <a:t>before touching persistence — client IDs are never trusted.</a:t>
+              <a:t>client IDs are never trusted.</a:t>
             </a:r>
           </a:p>
         </p:txBody>
@@ -10217,7 +13079,7 @@
                 </a:solidFill>
                 <a:latin typeface="Calibri"/>
               </a:rPr>
-              <a:t>PostgreSQL row-level security defaults to deny when trusted</a:t>
+              <a:t>RLS defaults to deny when trusted organization context is absent</a:t>
             </a:r>
           </a:p>
           <a:p>
@@ -10229,7 +13091,7 @@
                 </a:solidFill>
                 <a:latin typeface="Calibri"/>
               </a:rPr>
-              <a:t>organization context is absent (defense in depth).</a:t>
+              <a:t>(defense in depth).</a:t>
             </a:r>
           </a:p>
         </p:txBody>
@@ -10502,7 +13364,7 @@
                 </a:solidFill>
                 <a:latin typeface="Calibri"/>
               </a:rPr>
-              <a:t>Request with bearer token</a:t>
+              <a:t>Browser sends request with bearer token</a:t>
             </a:r>
           </a:p>
         </p:txBody>
@@ -11200,7 +14062,7 @@
                 </a:solidFill>
                 <a:latin typeface="Calibri"/>
               </a:rPr>
-              <a:t>SECURITY &amp; AI SAFETY</a:t>
+              <a:t>SECTION 5</a:t>
             </a:r>
           </a:p>
         </p:txBody>
@@ -11229,13 +14091,13 @@
           <a:p>
             <a:pPr algn="l"/>
             <a:r>
-              <a:rPr sz="2800" b="1" i="0">
+              <a:rPr sz="2600" b="1" i="0">
                 <a:solidFill>
                   <a:srgbClr val="0B213F"/>
                 </a:solidFill>
                 <a:latin typeface="Calibri"/>
               </a:rPr>
-              <a:t>Authorization Boundaries and Human Control</a:t>
+              <a:t>Security, Authorization &amp; AI Safety</a:t>
             </a:r>
           </a:p>
         </p:txBody>
@@ -11292,7 +14154,7 @@
         </p:nvSpPr>
         <p:spPr>
           <a:xfrm>
-            <a:off x="548640" y="1463040"/>
+            <a:off x="548640" y="1417320"/>
             <a:ext cx="3566160" cy="1965960"/>
           </a:xfrm>
           <a:prstGeom prst="roundRect">
@@ -11340,7 +14202,7 @@
         </p:nvSpPr>
         <p:spPr>
           <a:xfrm>
-            <a:off x="548640" y="1463040"/>
+            <a:off x="548640" y="1417320"/>
             <a:ext cx="3566160" cy="73152"/>
           </a:xfrm>
           <a:prstGeom prst="rect">
@@ -11384,7 +14246,7 @@
         </p:nvSpPr>
         <p:spPr>
           <a:xfrm>
-            <a:off x="731520" y="1645920"/>
+            <a:off x="731520" y="1600200"/>
             <a:ext cx="3200400" cy="457200"/>
           </a:xfrm>
           <a:prstGeom prst="rect">
@@ -11419,7 +14281,7 @@
         </p:nvSpPr>
         <p:spPr>
           <a:xfrm>
-            <a:off x="731520" y="2103120"/>
+            <a:off x="731520" y="2057400"/>
             <a:ext cx="3200400" cy="1188720"/>
           </a:xfrm>
           <a:prstGeom prst="rect">
@@ -11454,7 +14316,7 @@
         </p:nvSpPr>
         <p:spPr>
           <a:xfrm>
-            <a:off x="4343400" y="1463040"/>
+            <a:off x="4343400" y="1417320"/>
             <a:ext cx="3566160" cy="1965960"/>
           </a:xfrm>
           <a:prstGeom prst="roundRect">
@@ -11502,7 +14364,7 @@
         </p:nvSpPr>
         <p:spPr>
           <a:xfrm>
-            <a:off x="4343400" y="1463040"/>
+            <a:off x="4343400" y="1417320"/>
             <a:ext cx="3566160" cy="73152"/>
           </a:xfrm>
           <a:prstGeom prst="rect">
@@ -11546,7 +14408,7 @@
         </p:nvSpPr>
         <p:spPr>
           <a:xfrm>
-            <a:off x="4526280" y="1645920"/>
+            <a:off x="4526280" y="1600200"/>
             <a:ext cx="3200400" cy="457200"/>
           </a:xfrm>
           <a:prstGeom prst="rect">
@@ -11581,7 +14443,7 @@
         </p:nvSpPr>
         <p:spPr>
           <a:xfrm>
-            <a:off x="4526280" y="2103120"/>
+            <a:off x="4526280" y="2057400"/>
             <a:ext cx="3200400" cy="1188720"/>
           </a:xfrm>
           <a:prstGeom prst="rect">
@@ -11616,7 +14478,7 @@
         </p:nvSpPr>
         <p:spPr>
           <a:xfrm>
-            <a:off x="8138160" y="1463040"/>
+            <a:off x="8138160" y="1417320"/>
             <a:ext cx="3566160" cy="1965960"/>
           </a:xfrm>
           <a:prstGeom prst="roundRect">
@@ -11664,7 +14526,7 @@
         </p:nvSpPr>
         <p:spPr>
           <a:xfrm>
-            <a:off x="8138160" y="1463040"/>
+            <a:off x="8138160" y="1417320"/>
             <a:ext cx="3566160" cy="73152"/>
           </a:xfrm>
           <a:prstGeom prst="rect">
@@ -11708,7 +14570,7 @@
         </p:nvSpPr>
         <p:spPr>
           <a:xfrm>
-            <a:off x="8321040" y="1645920"/>
+            <a:off x="8321040" y="1600200"/>
             <a:ext cx="3200400" cy="457200"/>
           </a:xfrm>
           <a:prstGeom prst="rect">
@@ -11743,7 +14605,7 @@
         </p:nvSpPr>
         <p:spPr>
           <a:xfrm>
-            <a:off x="8321040" y="2103120"/>
+            <a:off x="8321040" y="2057400"/>
             <a:ext cx="3200400" cy="1188720"/>
           </a:xfrm>
           <a:prstGeom prst="rect">
@@ -11778,7 +14640,7 @@
         </p:nvSpPr>
         <p:spPr>
           <a:xfrm>
-            <a:off x="548640" y="3657600"/>
+            <a:off x="548640" y="3611880"/>
             <a:ext cx="3566160" cy="1965960"/>
           </a:xfrm>
           <a:prstGeom prst="roundRect">
@@ -11826,7 +14688,7 @@
         </p:nvSpPr>
         <p:spPr>
           <a:xfrm>
-            <a:off x="548640" y="3657600"/>
+            <a:off x="548640" y="3611880"/>
             <a:ext cx="3566160" cy="73152"/>
           </a:xfrm>
           <a:prstGeom prst="rect">
@@ -11870,7 +14732,7 @@
         </p:nvSpPr>
         <p:spPr>
           <a:xfrm>
-            <a:off x="731520" y="3840480"/>
+            <a:off x="731520" y="3794760"/>
             <a:ext cx="3200400" cy="457200"/>
           </a:xfrm>
           <a:prstGeom prst="rect">
@@ -11905,7 +14767,7 @@
         </p:nvSpPr>
         <p:spPr>
           <a:xfrm>
-            <a:off x="731520" y="4297680"/>
+            <a:off x="731520" y="4251960"/>
             <a:ext cx="3200400" cy="1188720"/>
           </a:xfrm>
           <a:prstGeom prst="rect">
@@ -11940,7 +14802,7 @@
         </p:nvSpPr>
         <p:spPr>
           <a:xfrm>
-            <a:off x="4343400" y="3657600"/>
+            <a:off x="4343400" y="3611880"/>
             <a:ext cx="3566160" cy="1965960"/>
           </a:xfrm>
           <a:prstGeom prst="roundRect">
@@ -11988,7 +14850,7 @@
         </p:nvSpPr>
         <p:spPr>
           <a:xfrm>
-            <a:off x="4343400" y="3657600"/>
+            <a:off x="4343400" y="3611880"/>
             <a:ext cx="3566160" cy="73152"/>
           </a:xfrm>
           <a:prstGeom prst="rect">
@@ -12032,7 +14894,7 @@
         </p:nvSpPr>
         <p:spPr>
           <a:xfrm>
-            <a:off x="4526280" y="3840480"/>
+            <a:off x="4526280" y="3794760"/>
             <a:ext cx="3200400" cy="457200"/>
           </a:xfrm>
           <a:prstGeom prst="rect">
@@ -12067,7 +14929,7 @@
         </p:nvSpPr>
         <p:spPr>
           <a:xfrm>
-            <a:off x="4526280" y="4297680"/>
+            <a:off x="4526280" y="4251960"/>
             <a:ext cx="3200400" cy="1188720"/>
           </a:xfrm>
           <a:prstGeom prst="rect">
@@ -12102,7 +14964,7 @@
         </p:nvSpPr>
         <p:spPr>
           <a:xfrm>
-            <a:off x="8138160" y="3657600"/>
+            <a:off x="8138160" y="3611880"/>
             <a:ext cx="3566160" cy="1965960"/>
           </a:xfrm>
           <a:prstGeom prst="roundRect">
@@ -12150,7 +15012,7 @@
         </p:nvSpPr>
         <p:spPr>
           <a:xfrm>
-            <a:off x="8138160" y="3657600"/>
+            <a:off x="8138160" y="3611880"/>
             <a:ext cx="3566160" cy="73152"/>
           </a:xfrm>
           <a:prstGeom prst="rect">
@@ -12194,7 +15056,7 @@
         </p:nvSpPr>
         <p:spPr>
           <a:xfrm>
-            <a:off x="8321040" y="3840480"/>
+            <a:off x="8321040" y="3794760"/>
             <a:ext cx="3200400" cy="457200"/>
           </a:xfrm>
           <a:prstGeom prst="rect">
@@ -12229,7 +15091,7 @@
         </p:nvSpPr>
         <p:spPr>
           <a:xfrm>
-            <a:off x="8321040" y="4297680"/>
+            <a:off x="8321040" y="4251960"/>
             <a:ext cx="3200400" cy="1188720"/>
           </a:xfrm>
           <a:prstGeom prst="rect">
@@ -12426,7 +15288,7 @@
                 </a:solidFill>
                 <a:latin typeface="Calibri"/>
               </a:rPr>
-              <a:t>DELIVERY</a:t>
+              <a:t>SECTION 6</a:t>
             </a:r>
           </a:p>
         </p:txBody>
@@ -12455,13 +15317,13 @@
           <a:p>
             <a:pPr algn="l"/>
             <a:r>
-              <a:rPr sz="2800" b="1" i="0">
+              <a:rPr sz="2600" b="1" i="0">
                 <a:solidFill>
                   <a:srgbClr val="0B213F"/>
                 </a:solidFill>
                 <a:latin typeface="Calibri"/>
               </a:rPr>
-              <a:t>CI/CD Pipeline and Quality Gates</a:t>
+              <a:t>Delivery Pipeline and Quality Gates</a:t>
             </a:r>
           </a:p>
         </p:txBody>
@@ -12518,7 +15380,7 @@
         </p:nvSpPr>
         <p:spPr>
           <a:xfrm>
-            <a:off x="548640" y="1737360"/>
+            <a:off x="548640" y="1600200"/>
             <a:ext cx="1691640" cy="1005840"/>
           </a:xfrm>
           <a:prstGeom prst="roundRect">
@@ -12566,7 +15428,7 @@
         </p:nvSpPr>
         <p:spPr>
           <a:xfrm>
-            <a:off x="548640" y="1737360"/>
+            <a:off x="548640" y="1600200"/>
             <a:ext cx="1691640" cy="1005840"/>
           </a:xfrm>
           <a:prstGeom prst="rect">
@@ -12613,7 +15475,7 @@
         </p:nvCxnSpPr>
         <p:spPr>
           <a:xfrm>
-            <a:off x="2240280" y="2240280.0"/>
+            <a:off x="2240280" y="2103120.0"/>
             <a:ext cx="256032" cy="0.0"/>
           </a:xfrm>
           <a:prstGeom prst="bentConnector3">
@@ -12649,7 +15511,7 @@
         </p:nvSpPr>
         <p:spPr>
           <a:xfrm>
-            <a:off x="2496312" y="1737360"/>
+            <a:off x="2496312" y="1600200"/>
             <a:ext cx="1691640" cy="1005840"/>
           </a:xfrm>
           <a:prstGeom prst="roundRect">
@@ -12697,7 +15559,7 @@
         </p:nvSpPr>
         <p:spPr>
           <a:xfrm>
-            <a:off x="2496312" y="1737360"/>
+            <a:off x="2496312" y="1600200"/>
             <a:ext cx="1691640" cy="1005840"/>
           </a:xfrm>
           <a:prstGeom prst="rect">
@@ -12744,7 +15606,7 @@
         </p:nvCxnSpPr>
         <p:spPr>
           <a:xfrm>
-            <a:off x="4187952" y="2240280.0"/>
+            <a:off x="4187952" y="2103120.0"/>
             <a:ext cx="256032" cy="0.0"/>
           </a:xfrm>
           <a:prstGeom prst="bentConnector3">
@@ -12780,7 +15642,7 @@
         </p:nvSpPr>
         <p:spPr>
           <a:xfrm>
-            <a:off x="4443984" y="1737360"/>
+            <a:off x="4443984" y="1600200"/>
             <a:ext cx="1691640" cy="1005840"/>
           </a:xfrm>
           <a:prstGeom prst="roundRect">
@@ -12828,7 +15690,7 @@
         </p:nvSpPr>
         <p:spPr>
           <a:xfrm>
-            <a:off x="4443984" y="1737360"/>
+            <a:off x="4443984" y="1600200"/>
             <a:ext cx="1691640" cy="1005840"/>
           </a:xfrm>
           <a:prstGeom prst="rect">
@@ -12875,7 +15737,7 @@
         </p:nvCxnSpPr>
         <p:spPr>
           <a:xfrm>
-            <a:off x="6135624" y="2240280.0"/>
+            <a:off x="6135624" y="2103120.0"/>
             <a:ext cx="256032" cy="0.0"/>
           </a:xfrm>
           <a:prstGeom prst="bentConnector3">
@@ -12911,7 +15773,7 @@
         </p:nvSpPr>
         <p:spPr>
           <a:xfrm>
-            <a:off x="6391656" y="1737360"/>
+            <a:off x="6391656" y="1600200"/>
             <a:ext cx="1691640" cy="1005840"/>
           </a:xfrm>
           <a:prstGeom prst="roundRect">
@@ -12959,7 +15821,7 @@
         </p:nvSpPr>
         <p:spPr>
           <a:xfrm>
-            <a:off x="6391656" y="1737360"/>
+            <a:off x="6391656" y="1600200"/>
             <a:ext cx="1691640" cy="1005840"/>
           </a:xfrm>
           <a:prstGeom prst="rect">
@@ -13006,7 +15868,7 @@
         </p:nvCxnSpPr>
         <p:spPr>
           <a:xfrm>
-            <a:off x="8083296" y="2240280.0"/>
+            <a:off x="8083296" y="2103120.0"/>
             <a:ext cx="256032" cy="0.0"/>
           </a:xfrm>
           <a:prstGeom prst="bentConnector3">
@@ -13042,7 +15904,7 @@
         </p:nvSpPr>
         <p:spPr>
           <a:xfrm>
-            <a:off x="8339328" y="1737360"/>
+            <a:off x="8339328" y="1600200"/>
             <a:ext cx="1691640" cy="1005840"/>
           </a:xfrm>
           <a:prstGeom prst="roundRect">
@@ -13090,7 +15952,7 @@
         </p:nvSpPr>
         <p:spPr>
           <a:xfrm>
-            <a:off x="8339328" y="1737360"/>
+            <a:off x="8339328" y="1600200"/>
             <a:ext cx="1691640" cy="1005840"/>
           </a:xfrm>
           <a:prstGeom prst="rect">
@@ -13137,7 +15999,7 @@
         </p:nvCxnSpPr>
         <p:spPr>
           <a:xfrm>
-            <a:off x="10030968" y="2240280.0"/>
+            <a:off x="10030968" y="2103120.0"/>
             <a:ext cx="256032" cy="0.0"/>
           </a:xfrm>
           <a:prstGeom prst="bentConnector3">
@@ -13173,7 +16035,7 @@
         </p:nvSpPr>
         <p:spPr>
           <a:xfrm>
-            <a:off x="10287000" y="1737360"/>
+            <a:off x="10287000" y="1600200"/>
             <a:ext cx="1691640" cy="1005840"/>
           </a:xfrm>
           <a:prstGeom prst="roundRect">
@@ -13221,7 +16083,7 @@
         </p:nvSpPr>
         <p:spPr>
           <a:xfrm>
-            <a:off x="10287000" y="1737360"/>
+            <a:off x="10287000" y="1600200"/>
             <a:ext cx="1691640" cy="1005840"/>
           </a:xfrm>
           <a:prstGeom prst="rect">
@@ -13268,7 +16130,7 @@
         </p:nvSpPr>
         <p:spPr>
           <a:xfrm>
-            <a:off x="548640" y="3063240"/>
+            <a:off x="548640" y="2926080"/>
             <a:ext cx="10972800" cy="365760"/>
           </a:xfrm>
           <a:prstGeom prst="rect">
@@ -13304,8 +16166,8 @@
           <p:nvPr/>
         </p:nvGraphicFramePr>
         <p:xfrm>
-          <a:off x="548640" y="3520440"/>
-          <a:ext cx="11064240" cy="1828800"/>
+          <a:off x="548640" y="3383280"/>
+          <a:ext cx="11064240" cy="2286000"/>
         </p:xfrm>
         <a:graphic>
           <a:graphicData uri="http://schemas.openxmlformats.org/drawingml/2006/table">
@@ -13325,9 +16187,55 @@
                     <a:p>
                       <a:pPr algn="l"/>
                       <a:r>
-                        <a:rPr sz="1200" b="1">
+                        <a:rPr sz="1250" b="1">
                           <a:solidFill>
                             <a:srgbClr val="FFFFFF"/>
+                          </a:solidFill>
+                        </a:rPr>
+                        <a:t>Aspect</a:t>
+                      </a:r>
+                    </a:p>
+                  </a:txBody>
+                  <a:tcPr anchor="ctr" marL="73152" marR="73152" marT="27432" marB="27432">
+                    <a:solidFill>
+                      <a:srgbClr val="0B213F"/>
+                    </a:solidFill>
+                  </a:tcPr>
+                </a:tc>
+                <a:tc>
+                  <a:txBody>
+                    <a:bodyPr/>
+                    <a:lstStyle/>
+                    <a:p>
+                      <a:pPr algn="l"/>
+                      <a:r>
+                        <a:rPr sz="1250" b="1">
+                          <a:solidFill>
+                            <a:srgbClr val="FFFFFF"/>
+                          </a:solidFill>
+                        </a:rPr>
+                        <a:t>Detail</a:t>
+                      </a:r>
+                    </a:p>
+                  </a:txBody>
+                  <a:tcPr anchor="ctr" marL="73152" marR="73152" marT="27432" marB="27432">
+                    <a:solidFill>
+                      <a:srgbClr val="0B213F"/>
+                    </a:solidFill>
+                  </a:tcPr>
+                </a:tc>
+              </a:tr>
+              <a:tr h="457200">
+                <a:tc>
+                  <a:txBody>
+                    <a:bodyPr/>
+                    <a:lstStyle/>
+                    <a:p>
+                      <a:pPr algn="l"/>
+                      <a:r>
+                        <a:rPr sz="1150" b="1">
+                          <a:solidFill>
+                            <a:srgbClr val="0B213F"/>
                           </a:solidFill>
                         </a:rPr>
                         <a:t>Identity</a:t>
@@ -13336,7 +16244,7 @@
                   </a:txBody>
                   <a:tcPr anchor="ctr" marL="73152" marR="73152" marT="27432" marB="27432">
                     <a:solidFill>
-                      <a:srgbClr val="0B213F"/>
+                      <a:srgbClr val="FFFFFF"/>
                     </a:solidFill>
                   </a:tcPr>
                 </a:tc>
@@ -13358,7 +16266,7 @@
                   </a:txBody>
                   <a:tcPr anchor="ctr" marL="73152" marR="73152" marT="27432" marB="27432">
                     <a:solidFill>
-                      <a:srgbClr val="F4F6F8"/>
+                      <a:srgbClr val="FFFFFF"/>
                     </a:solidFill>
                   </a:tcPr>
                 </a:tc>
@@ -13371,9 +16279,9 @@
                     <a:p>
                       <a:pPr algn="l"/>
                       <a:r>
-                        <a:rPr sz="1200" b="1">
+                        <a:rPr sz="1150" b="1">
                           <a:solidFill>
-                            <a:srgbClr val="FFFFFF"/>
+                            <a:srgbClr val="0B213F"/>
                           </a:solidFill>
                         </a:rPr>
                         <a:t>Environments</a:t>
@@ -13382,7 +16290,7 @@
                   </a:txBody>
                   <a:tcPr anchor="ctr" marL="73152" marR="73152" marT="27432" marB="27432">
                     <a:solidFill>
-                      <a:srgbClr val="0B213F"/>
+                      <a:srgbClr val="F4F6F8"/>
                     </a:solidFill>
                   </a:tcPr>
                 </a:tc>
@@ -13404,7 +16312,7 @@
                   </a:txBody>
                   <a:tcPr anchor="ctr" marL="73152" marR="73152" marT="27432" marB="27432">
                     <a:solidFill>
-                      <a:srgbClr val="FFFFFF"/>
+                      <a:srgbClr val="F4F6F8"/>
                     </a:solidFill>
                   </a:tcPr>
                 </a:tc>
@@ -13417,9 +16325,9 @@
                     <a:p>
                       <a:pPr algn="l"/>
                       <a:r>
-                        <a:rPr sz="1200" b="1">
+                        <a:rPr sz="1150" b="1">
                           <a:solidFill>
-                            <a:srgbClr val="FFFFFF"/>
+                            <a:srgbClr val="0B213F"/>
                           </a:solidFill>
                         </a:rPr>
                         <a:t>Promotion</a:t>
@@ -13428,7 +16336,7 @@
                   </a:txBody>
                   <a:tcPr anchor="ctr" marL="73152" marR="73152" marT="27432" marB="27432">
                     <a:solidFill>
-                      <a:srgbClr val="0B213F"/>
+                      <a:srgbClr val="FFFFFF"/>
                     </a:solidFill>
                   </a:tcPr>
                 </a:tc>
@@ -13450,7 +16358,7 @@
                   </a:txBody>
                   <a:tcPr anchor="ctr" marL="73152" marR="73152" marT="27432" marB="27432">
                     <a:solidFill>
-                      <a:srgbClr val="F4F6F8"/>
+                      <a:srgbClr val="FFFFFF"/>
                     </a:solidFill>
                   </a:tcPr>
                 </a:tc>
@@ -13463,9 +16371,9 @@
                     <a:p>
                       <a:pPr algn="l"/>
                       <a:r>
-                        <a:rPr sz="1200" b="1">
+                        <a:rPr sz="1150" b="1">
                           <a:solidFill>
-                            <a:srgbClr val="FFFFFF"/>
+                            <a:srgbClr val="0B213F"/>
                           </a:solidFill>
                         </a:rPr>
                         <a:t>Evidence</a:t>
@@ -13474,7 +16382,7 @@
                   </a:txBody>
                   <a:tcPr anchor="ctr" marL="73152" marR="73152" marT="27432" marB="27432">
                     <a:solidFill>
-                      <a:srgbClr val="0B213F"/>
+                      <a:srgbClr val="F4F6F8"/>
                     </a:solidFill>
                   </a:tcPr>
                 </a:tc>
@@ -13496,7 +16404,7 @@
                   </a:txBody>
                   <a:tcPr anchor="ctr" marL="73152" marR="73152" marT="27432" marB="27432">
                     <a:solidFill>
-                      <a:srgbClr val="FFFFFF"/>
+                      <a:srgbClr val="F4F6F8"/>
                     </a:solidFill>
                   </a:tcPr>
                 </a:tc>
@@ -13675,7 +16583,7 @@
                 </a:solidFill>
                 <a:latin typeface="Calibri"/>
               </a:rPr>
-              <a:t>DECISIONS</a:t>
+              <a:t>SECTION 7</a:t>
             </a:r>
           </a:p>
         </p:txBody>
@@ -13704,7 +16612,7 @@
           <a:p>
             <a:pPr algn="l"/>
             <a:r>
-              <a:rPr sz="2800" b="1" i="0">
+              <a:rPr sz="2600" b="1" i="0">
                 <a:solidFill>
                   <a:srgbClr val="0B213F"/>
                 </a:solidFill>
@@ -13769,7 +16677,7 @@
         </p:nvGraphicFramePr>
         <p:xfrm>
           <a:off x="548640" y="1417320"/>
-          <a:ext cx="11064240" cy="3968496"/>
+          <a:ext cx="11064240" cy="3200400"/>
         </p:xfrm>
         <a:graphic>
           <a:graphicData uri="http://schemas.openxmlformats.org/drawingml/2006/table">
@@ -13782,7 +16690,7 @@
                 <a:gridCol w="3108960"/>
                 <a:gridCol w="6583680"/>
               </a:tblGrid>
-              <a:tr h="566928">
+              <a:tr h="457200">
                 <a:tc>
                   <a:txBody>
                     <a:bodyPr/>
@@ -13850,7 +16758,7 @@
                   </a:tcPr>
                 </a:tc>
               </a:tr>
-              <a:tr h="566928">
+              <a:tr h="457200">
                 <a:tc>
                   <a:txBody>
                     <a:bodyPr/>
@@ -13880,7 +16788,7 @@
                     <a:p>
                       <a:pPr algn="l"/>
                       <a:r>
-                        <a:rPr sz="1100" b="1">
+                        <a:rPr sz="1100" b="0">
                           <a:solidFill>
                             <a:srgbClr val="0B213F"/>
                           </a:solidFill>
@@ -13902,9 +16810,9 @@
                     <a:p>
                       <a:pPr algn="l"/>
                       <a:r>
-                        <a:rPr sz="1050" b="0">
+                        <a:rPr sz="1100" b="0">
                           <a:solidFill>
-                            <a:srgbClr val="555F6B"/>
+                            <a:srgbClr val="0B213F"/>
                           </a:solidFill>
                         </a:rPr>
                         <a:t>One API, internally enforced domain modules; service extraction deferred until measurable value</a:t>
@@ -13918,7 +16826,7 @@
                   </a:tcPr>
                 </a:tc>
               </a:tr>
-              <a:tr h="566928">
+              <a:tr h="457200">
                 <a:tc>
                   <a:txBody>
                     <a:bodyPr/>
@@ -13948,7 +16856,7 @@
                     <a:p>
                       <a:pPr algn="l"/>
                       <a:r>
-                        <a:rPr sz="1100" b="1">
+                        <a:rPr sz="1100" b="0">
                           <a:solidFill>
                             <a:srgbClr val="0B213F"/>
                           </a:solidFill>
@@ -13970,9 +16878,9 @@
                     <a:p>
                       <a:pPr algn="l"/>
                       <a:r>
-                        <a:rPr sz="1050" b="0">
+                        <a:rPr sz="1100" b="0">
                           <a:solidFill>
-                            <a:srgbClr val="555F6B"/>
+                            <a:srgbClr val="0B213F"/>
                           </a:solidFill>
                         </a:rPr>
                         <a:t>pnpm + Turborepo; framework-free domain code kept portable</a:t>
@@ -13986,7 +16894,7 @@
                   </a:tcPr>
                 </a:tc>
               </a:tr>
-              <a:tr h="566928">
+              <a:tr h="457200">
                 <a:tc>
                   <a:txBody>
                     <a:bodyPr/>
@@ -14016,7 +16924,7 @@
                     <a:p>
                       <a:pPr algn="l"/>
                       <a:r>
-                        <a:rPr sz="1100" b="1">
+                        <a:rPr sz="1100" b="0">
                           <a:solidFill>
                             <a:srgbClr val="0B213F"/>
                           </a:solidFill>
@@ -14038,9 +16946,9 @@
                     <a:p>
                       <a:pPr algn="l"/>
                       <a:r>
-                        <a:rPr sz="1050" b="0">
+                        <a:rPr sz="1100" b="0">
                           <a:solidFill>
-                            <a:srgbClr val="555F6B"/>
+                            <a:srgbClr val="0B213F"/>
                           </a:solidFill>
                         </a:rPr>
                         <a:t>Application authorizes first; RLS is defense in depth, not the authorizer</a:t>
@@ -14054,7 +16962,7 @@
                   </a:tcPr>
                 </a:tc>
               </a:tr>
-              <a:tr h="566928">
+              <a:tr h="457200">
                 <a:tc>
                   <a:txBody>
                     <a:bodyPr/>
@@ -14084,7 +16992,7 @@
                     <a:p>
                       <a:pPr algn="l"/>
                       <a:r>
-                        <a:rPr sz="1100" b="1">
+                        <a:rPr sz="1100" b="0">
                           <a:solidFill>
                             <a:srgbClr val="0B213F"/>
                           </a:solidFill>
@@ -14106,9 +17014,9 @@
                     <a:p>
                       <a:pPr algn="l"/>
                       <a:r>
-                        <a:rPr sz="1050" b="0">
+                        <a:rPr sz="1100" b="0">
                           <a:solidFill>
-                            <a:srgbClr val="555F6B"/>
+                            <a:srgbClr val="0B213F"/>
                           </a:solidFill>
                         </a:rPr>
                         <a:t>One dev environment; test/prod and extra services deferred until justified</a:t>
@@ -14122,7 +17030,7 @@
                   </a:tcPr>
                 </a:tc>
               </a:tr>
-              <a:tr h="566928">
+              <a:tr h="457200">
                 <a:tc>
                   <a:txBody>
                     <a:bodyPr/>
@@ -14152,7 +17060,7 @@
                     <a:p>
                       <a:pPr algn="l"/>
                       <a:r>
-                        <a:rPr sz="1100" b="1">
+                        <a:rPr sz="1100" b="0">
                           <a:solidFill>
                             <a:srgbClr val="0B213F"/>
                           </a:solidFill>
@@ -14174,9 +17082,9 @@
                     <a:p>
                       <a:pPr algn="l"/>
                       <a:r>
-                        <a:rPr sz="1050" b="0">
+                        <a:rPr sz="1100" b="0">
                           <a:solidFill>
-                            <a:srgbClr val="555F6B"/>
+                            <a:srgbClr val="0B213F"/>
                           </a:solidFill>
                         </a:rPr>
                         <a:t>Removed the web BFF hop; API independently authorizes every request</a:t>
@@ -14190,7 +17098,7 @@
                   </a:tcPr>
                 </a:tc>
               </a:tr>
-              <a:tr h="566928">
+              <a:tr h="457200">
                 <a:tc>
                   <a:txBody>
                     <a:bodyPr/>
@@ -14220,7 +17128,7 @@
                     <a:p>
                       <a:pPr algn="l"/>
                       <a:r>
-                        <a:rPr sz="1100" b="1">
+                        <a:rPr sz="1100" b="0">
                           <a:solidFill>
                             <a:srgbClr val="0B213F"/>
                           </a:solidFill>
@@ -14242,9 +17150,9 @@
                     <a:p>
                       <a:pPr algn="l"/>
                       <a:r>
-                        <a:rPr sz="1050" b="0">
+                        <a:rPr sz="1100" b="0">
                           <a:solidFill>
-                            <a:srgbClr val="555F6B"/>
+                            <a:srgbClr val="0B213F"/>
                           </a:solidFill>
                         </a:rPr>
                         <a:t>No long-lived Azure credentials; federated identity per environment</a:t>
